--- a/slides/第13回_機械学習からLLM・エージェントAIへ.pptx
+++ b/slides/第13回_機械学習からLLM・エージェントAIへ.pptx
@@ -6564,7 +6564,7 @@
         <p:spPr>
           <a:xfrm>
             <a:off x="685800" y="1481328"/>
-            <a:ext cx="10789920" cy="621792"/>
+            <a:ext cx="10789920" cy="566928"/>
           </a:xfrm>
           <a:prstGeom prst="rect">
             <a:avLst/>
@@ -6605,7 +6605,7 @@
         </p:nvSpPr>
         <p:spPr>
           <a:xfrm>
-            <a:off x="685800" y="2139696"/>
+            <a:off x="685800" y="2084832"/>
             <a:ext cx="5166360" cy="292608"/>
           </a:xfrm>
           <a:prstGeom prst="rect">
@@ -6644,7 +6644,7 @@
         </p:nvSpPr>
         <p:spPr>
           <a:xfrm>
-            <a:off x="685800" y="2542032"/>
+            <a:off x="685800" y="2487168"/>
             <a:ext cx="5166360" cy="1554480"/>
           </a:xfrm>
           <a:prstGeom prst="rect">
@@ -6715,7 +6715,7 @@
         </p:nvSpPr>
         <p:spPr>
           <a:xfrm>
-            <a:off x="6309360" y="2139696"/>
+            <a:off x="6309360" y="2084832"/>
             <a:ext cx="5166360" cy="292608"/>
           </a:xfrm>
           <a:prstGeom prst="rect">
@@ -6754,7 +6754,7 @@
         </p:nvSpPr>
         <p:spPr>
           <a:xfrm>
-            <a:off x="6309360" y="2542032"/>
+            <a:off x="6309360" y="2487168"/>
             <a:ext cx="5166360" cy="1554480"/>
           </a:xfrm>
           <a:prstGeom prst="rect">
@@ -11111,7 +11111,7 @@
         <p:spPr>
           <a:xfrm>
             <a:off x="685800" y="1481328"/>
-            <a:ext cx="10789920" cy="621792"/>
+            <a:ext cx="10789920" cy="365760"/>
           </a:xfrm>
           <a:prstGeom prst="rect">
             <a:avLst/>
@@ -11160,8 +11160,8 @@
         </p:blipFill>
         <p:spPr>
           <a:xfrm>
-            <a:off x="3342548" y="2139696"/>
-            <a:ext cx="5476425" cy="3346704"/>
+            <a:off x="3133067" y="1883664"/>
+            <a:ext cx="5895386" cy="3602736"/>
           </a:xfrm>
           <a:prstGeom prst="rect">
             <a:avLst/>
@@ -13057,7 +13057,7 @@
         <p:spPr>
           <a:xfrm>
             <a:off x="685800" y="1481328"/>
-            <a:ext cx="10789920" cy="621792"/>
+            <a:ext cx="10789920" cy="566928"/>
           </a:xfrm>
           <a:prstGeom prst="rect">
             <a:avLst/>
@@ -13098,7 +13098,7 @@
         </p:nvSpPr>
         <p:spPr>
           <a:xfrm>
-            <a:off x="685800" y="2185416"/>
+            <a:off x="685800" y="2130552"/>
             <a:ext cx="10789920" cy="713232"/>
           </a:xfrm>
           <a:prstGeom prst="roundRect">
@@ -13125,7 +13125,7 @@
         </p:nvSpPr>
         <p:spPr>
           <a:xfrm>
-            <a:off x="914400" y="2340864"/>
+            <a:off x="914400" y="2286000"/>
             <a:ext cx="10332720" cy="402336"/>
           </a:xfrm>
           <a:prstGeom prst="rect">
@@ -13164,7 +13164,7 @@
         </p:nvSpPr>
         <p:spPr>
           <a:xfrm>
-            <a:off x="1188720" y="3145536"/>
+            <a:off x="1188720" y="3090672"/>
             <a:ext cx="4572000" cy="457200"/>
           </a:xfrm>
           <a:prstGeom prst="rect">
@@ -13203,7 +13203,7 @@
         </p:nvSpPr>
         <p:spPr>
           <a:xfrm>
-            <a:off x="5943600" y="3273552"/>
+            <a:off x="5943600" y="3218688"/>
             <a:ext cx="640080" cy="201168"/>
           </a:xfrm>
           <a:prstGeom prst="rightArrow">
@@ -13223,7 +13223,7 @@
         </p:nvSpPr>
         <p:spPr>
           <a:xfrm>
-            <a:off x="6766560" y="3145536"/>
+            <a:off x="6766560" y="3090672"/>
             <a:ext cx="4206240" cy="457200"/>
           </a:xfrm>
           <a:prstGeom prst="rect">
@@ -13262,7 +13262,7 @@
         </p:nvSpPr>
         <p:spPr>
           <a:xfrm>
-            <a:off x="1188720" y="3767328"/>
+            <a:off x="1188720" y="3712464"/>
             <a:ext cx="4572000" cy="457200"/>
           </a:xfrm>
           <a:prstGeom prst="rect">
@@ -13301,7 +13301,7 @@
         </p:nvSpPr>
         <p:spPr>
           <a:xfrm>
-            <a:off x="5943600" y="3895344"/>
+            <a:off x="5943600" y="3840480"/>
             <a:ext cx="640080" cy="201168"/>
           </a:xfrm>
           <a:prstGeom prst="rightArrow">
@@ -13321,7 +13321,7 @@
         </p:nvSpPr>
         <p:spPr>
           <a:xfrm>
-            <a:off x="6766560" y="3767328"/>
+            <a:off x="6766560" y="3712464"/>
             <a:ext cx="4206240" cy="457200"/>
           </a:xfrm>
           <a:prstGeom prst="rect">
@@ -13360,7 +13360,7 @@
         </p:nvSpPr>
         <p:spPr>
           <a:xfrm>
-            <a:off x="1188720" y="4389120"/>
+            <a:off x="1188720" y="4334256"/>
             <a:ext cx="4572000" cy="457200"/>
           </a:xfrm>
           <a:prstGeom prst="rect">
@@ -13399,7 +13399,7 @@
         </p:nvSpPr>
         <p:spPr>
           <a:xfrm>
-            <a:off x="5943600" y="4517136"/>
+            <a:off x="5943600" y="4462272"/>
             <a:ext cx="640080" cy="201168"/>
           </a:xfrm>
           <a:prstGeom prst="rightArrow">
@@ -13419,7 +13419,7 @@
         </p:nvSpPr>
         <p:spPr>
           <a:xfrm>
-            <a:off x="6766560" y="4389120"/>
+            <a:off x="6766560" y="4334256"/>
             <a:ext cx="4206240" cy="457200"/>
           </a:xfrm>
           <a:prstGeom prst="rect">
@@ -13458,7 +13458,7 @@
         </p:nvSpPr>
         <p:spPr>
           <a:xfrm>
-            <a:off x="685800" y="5102352"/>
+            <a:off x="685800" y="5047488"/>
             <a:ext cx="10789920" cy="457200"/>
           </a:xfrm>
           <a:prstGeom prst="rect">
@@ -16978,7 +16978,7 @@
         <p:spPr>
           <a:xfrm>
             <a:off x="685800" y="1481328"/>
-            <a:ext cx="10789920" cy="621792"/>
+            <a:ext cx="10789920" cy="566928"/>
           </a:xfrm>
           <a:prstGeom prst="rect">
             <a:avLst/>
@@ -17019,7 +17019,7 @@
         </p:nvSpPr>
         <p:spPr>
           <a:xfrm>
-            <a:off x="685800" y="2185416"/>
+            <a:off x="685800" y="2130552"/>
             <a:ext cx="10789920" cy="713232"/>
           </a:xfrm>
           <a:prstGeom prst="roundRect">
@@ -17046,7 +17046,7 @@
         </p:nvSpPr>
         <p:spPr>
           <a:xfrm>
-            <a:off x="914400" y="2340864"/>
+            <a:off x="914400" y="2286000"/>
             <a:ext cx="10332720" cy="402336"/>
           </a:xfrm>
           <a:prstGeom prst="rect">
@@ -17085,7 +17085,7 @@
         </p:nvSpPr>
         <p:spPr>
           <a:xfrm>
-            <a:off x="1188720" y="3145536"/>
+            <a:off x="1188720" y="3090672"/>
             <a:ext cx="4572000" cy="457200"/>
           </a:xfrm>
           <a:prstGeom prst="rect">
@@ -17124,7 +17124,7 @@
         </p:nvSpPr>
         <p:spPr>
           <a:xfrm>
-            <a:off x="5943600" y="3273552"/>
+            <a:off x="5943600" y="3218688"/>
             <a:ext cx="640080" cy="201168"/>
           </a:xfrm>
           <a:prstGeom prst="rightArrow">
@@ -17144,7 +17144,7 @@
         </p:nvSpPr>
         <p:spPr>
           <a:xfrm>
-            <a:off x="6766560" y="3145536"/>
+            <a:off x="6766560" y="3090672"/>
             <a:ext cx="4206240" cy="457200"/>
           </a:xfrm>
           <a:prstGeom prst="rect">
@@ -17183,7 +17183,7 @@
         </p:nvSpPr>
         <p:spPr>
           <a:xfrm>
-            <a:off x="1188720" y="3767328"/>
+            <a:off x="1188720" y="3712464"/>
             <a:ext cx="4572000" cy="457200"/>
           </a:xfrm>
           <a:prstGeom prst="rect">
@@ -17222,7 +17222,7 @@
         </p:nvSpPr>
         <p:spPr>
           <a:xfrm>
-            <a:off x="5943600" y="3895344"/>
+            <a:off x="5943600" y="3840480"/>
             <a:ext cx="640080" cy="201168"/>
           </a:xfrm>
           <a:prstGeom prst="rightArrow">
@@ -17242,7 +17242,7 @@
         </p:nvSpPr>
         <p:spPr>
           <a:xfrm>
-            <a:off x="6766560" y="3767328"/>
+            <a:off x="6766560" y="3712464"/>
             <a:ext cx="4206240" cy="457200"/>
           </a:xfrm>
           <a:prstGeom prst="rect">
@@ -17281,7 +17281,7 @@
         </p:nvSpPr>
         <p:spPr>
           <a:xfrm>
-            <a:off x="1188720" y="4389120"/>
+            <a:off x="1188720" y="4334256"/>
             <a:ext cx="4572000" cy="457200"/>
           </a:xfrm>
           <a:prstGeom prst="rect">
@@ -17320,7 +17320,7 @@
         </p:nvSpPr>
         <p:spPr>
           <a:xfrm>
-            <a:off x="5943600" y="4517136"/>
+            <a:off x="5943600" y="4462272"/>
             <a:ext cx="640080" cy="201168"/>
           </a:xfrm>
           <a:prstGeom prst="rightArrow">
@@ -17340,7 +17340,7 @@
         </p:nvSpPr>
         <p:spPr>
           <a:xfrm>
-            <a:off x="6766560" y="4389120"/>
+            <a:off x="6766560" y="4334256"/>
             <a:ext cx="4206240" cy="457200"/>
           </a:xfrm>
           <a:prstGeom prst="rect">
@@ -17379,7 +17379,7 @@
         </p:nvSpPr>
         <p:spPr>
           <a:xfrm>
-            <a:off x="1188720" y="5010912"/>
+            <a:off x="1188720" y="4956048"/>
             <a:ext cx="4572000" cy="457200"/>
           </a:xfrm>
           <a:prstGeom prst="rect">
@@ -17418,7 +17418,7 @@
         </p:nvSpPr>
         <p:spPr>
           <a:xfrm>
-            <a:off x="5943600" y="5138928"/>
+            <a:off x="5943600" y="5084064"/>
             <a:ext cx="640080" cy="201168"/>
           </a:xfrm>
           <a:prstGeom prst="rightArrow">
@@ -17438,7 +17438,7 @@
         </p:nvSpPr>
         <p:spPr>
           <a:xfrm>
-            <a:off x="6766560" y="5010912"/>
+            <a:off x="6766560" y="4956048"/>
             <a:ext cx="4206240" cy="457200"/>
           </a:xfrm>
           <a:prstGeom prst="rect">
@@ -17477,7 +17477,7 @@
         </p:nvSpPr>
         <p:spPr>
           <a:xfrm>
-            <a:off x="685800" y="5724144"/>
+            <a:off x="685800" y="5669280"/>
             <a:ext cx="10789920" cy="457200"/>
           </a:xfrm>
           <a:prstGeom prst="rect">
@@ -20548,7 +20548,7 @@
         <p:spPr>
           <a:xfrm>
             <a:off x="685800" y="1481328"/>
-            <a:ext cx="10789920" cy="621792"/>
+            <a:ext cx="10789920" cy="566928"/>
           </a:xfrm>
           <a:prstGeom prst="rect">
             <a:avLst/>
@@ -20597,8 +20597,8 @@
         </p:blipFill>
         <p:spPr>
           <a:xfrm>
-            <a:off x="2734056" y="2139696"/>
-            <a:ext cx="6693408" cy="3346704"/>
+            <a:off x="2679192" y="2084832"/>
+            <a:ext cx="6803136" cy="3401568"/>
           </a:xfrm>
           <a:prstGeom prst="rect">
             <a:avLst/>
@@ -23098,7 +23098,7 @@
         <p:spPr>
           <a:xfrm>
             <a:off x="685800" y="1481328"/>
-            <a:ext cx="10789920" cy="621792"/>
+            <a:ext cx="10789920" cy="566928"/>
           </a:xfrm>
           <a:prstGeom prst="rect">
             <a:avLst/>
@@ -23147,53 +23147,14 @@
         </p:blipFill>
         <p:spPr>
           <a:xfrm>
-            <a:off x="3291840" y="2139696"/>
-            <a:ext cx="5577840" cy="3346704"/>
+            <a:off x="3246120" y="2084832"/>
+            <a:ext cx="5669280" cy="3401568"/>
           </a:xfrm>
           <a:prstGeom prst="rect">
             <a:avLst/>
           </a:prstGeom>
         </p:spPr>
       </p:pic>
-      <p:sp>
-        <p:nvSpPr>
-          <p:cNvPr id="7" name="Text 4"/>
-          <p:cNvSpPr/>
-          <p:nvPr/>
-        </p:nvSpPr>
-        <p:spPr>
-          <a:xfrm>
-            <a:off x="685800" y="5687568"/>
-            <a:ext cx="10789920" cy="365760"/>
-          </a:xfrm>
-          <a:prstGeom prst="rect">
-            <a:avLst/>
-          </a:prstGeom>
-          <a:noFill/>
-          <a:ln/>
-        </p:spPr>
-        <p:txBody>
-          <a:bodyPr wrap="square" lIns="0" tIns="0" rIns="0" bIns="0" rtlCol="0" anchor="ctr"/>
-          <a:lstStyle/>
-          <a:p>
-            <a:pPr algn="ctr" indent="0" marL="0">
-              <a:buNone/>
-            </a:pPr>
-            <a:r>
-              <a:rPr lang="en-US" sz="1500" dirty="0">
-                <a:solidFill>
-                  <a:srgbClr val="16191D"/>
-                </a:solidFill>
-                <a:latin typeface="Yu Gothic" pitchFamily="34" charset="0"/>
-                <a:ea typeface="Yu Gothic" pitchFamily="34" charset="-122"/>
-                <a:cs typeface="Yu Gothic" pitchFamily="34" charset="-120"/>
-              </a:rPr>
-              <a:t>非線形の活性化関数がないと、何層重ねても1つの線形変換にしかならない。</a:t>
-            </a:r>
-            <a:endParaRPr lang="en-US" sz="1500" dirty="0"/>
-          </a:p>
-        </p:txBody>
-      </p:sp>
     </p:spTree>
   </p:cSld>
   <p:clrMapOvr>

--- a/slides/第13回_機械学習からLLM・エージェントAIへ.pptx
+++ b/slides/第13回_機械学習からLLM・エージェントAIへ.pptx
@@ -7074,45 +7074,6 @@
           </a:prstGeom>
         </p:spPr>
       </p:pic>
-      <p:sp>
-        <p:nvSpPr>
-          <p:cNvPr id="7" name="Text 4"/>
-          <p:cNvSpPr/>
-          <p:nvPr/>
-        </p:nvSpPr>
-        <p:spPr>
-          <a:xfrm>
-            <a:off x="685800" y="5687568"/>
-            <a:ext cx="10789920" cy="365760"/>
-          </a:xfrm>
-          <a:prstGeom prst="rect">
-            <a:avLst/>
-          </a:prstGeom>
-          <a:noFill/>
-          <a:ln/>
-        </p:spPr>
-        <p:txBody>
-          <a:bodyPr wrap="square" lIns="0" tIns="0" rIns="0" bIns="0" rtlCol="0" anchor="ctr"/>
-          <a:lstStyle/>
-          <a:p>
-            <a:pPr algn="ctr" indent="0" marL="0">
-              <a:buNone/>
-            </a:pPr>
-            <a:r>
-              <a:rPr lang="en-US" sz="1500" dirty="0">
-                <a:solidFill>
-                  <a:srgbClr val="16191D"/>
-                </a:solidFill>
-                <a:latin typeface="Yu Gothic" pitchFamily="34" charset="0"/>
-                <a:ea typeface="Yu Gothic" pitchFamily="34" charset="-122"/>
-                <a:cs typeface="Yu Gothic" pitchFamily="34" charset="-120"/>
-              </a:rPr>
-              <a:t>全単語の関係を一度に計算できる。だから GPU で完全に並列化でき、規模を桁違いに大きくできた。</a:t>
-            </a:r>
-            <a:endParaRPr lang="en-US" sz="1500" dirty="0"/>
-          </a:p>
-        </p:txBody>
-      </p:sp>
     </p:spTree>
   </p:cSld>
   <p:clrMapOvr>

--- a/slides/第13回_機械学習からLLM・エージェントAIへ.pptx
+++ b/slides/第13回_機械学習からLLM・エージェントAIへ.pptx
@@ -33,9 +33,10 @@
     <p:sldId id="281" r:id="rId27"/>
     <p:sldId id="282" r:id="rId28"/>
     <p:sldId id="283" r:id="rId29"/>
+    <p:sldId id="284" r:id="rId30"/>
   </p:sldIdLst>
   <p:notesMasterIdLst>
-    <p:notesMasterId r:id="rId30"/>
+    <p:notesMasterId r:id="rId31"/>
   </p:notesMasterIdLst>
   <p:sldSz cx="12192000" cy="6858000"/>
   <p:notesSz cx="6858000" cy="12192000"/>
@@ -2313,6 +2314,94 @@
             <a:fld id="{F7021451-1387-4CA6-816F-3879F97B5CBC}" type="slidenum">
               <a:rPr lang="en-US"/>
               <a:t>28</a:t>
+            </a:fld>
+            <a:endParaRPr lang="en-US"/>
+          </a:p>
+        </p:txBody>
+      </p:sp>
+    </p:spTree>
+    <p:extLst>
+      <p:ext uri="{BB962C8B-B14F-4D97-AF65-F5344CB8AC3E}">
+        <p14:creationId xmlns:p14="http://schemas.microsoft.com/office/powerpoint/2010/main" val="1024086991"/>
+      </p:ext>
+    </p:extLst>
+  </p:cSld>
+  <p:clrMapOvr>
+    <a:masterClrMapping/>
+  </p:clrMapOvr>
+</p:notes>
+</file>
+
+<file path=ppt/notesSlides/notesSlide29.xml><?xml version="1.0" encoding="utf-8"?>
+<p:notes xmlns:a="http://schemas.openxmlformats.org/drawingml/2006/main" xmlns:r="http://schemas.openxmlformats.org/officeDocument/2006/relationships" xmlns:p="http://schemas.openxmlformats.org/presentationml/2006/main">
+  <p:cSld>
+    <p:spTree>
+      <p:nvGrpSpPr>
+        <p:cNvPr id="1" name=""/>
+        <p:cNvGrpSpPr/>
+        <p:nvPr/>
+      </p:nvGrpSpPr>
+      <p:grpSpPr>
+        <a:xfrm>
+          <a:off x="0" y="0"/>
+          <a:ext cx="0" cy="0"/>
+          <a:chOff x="0" y="0"/>
+          <a:chExt cx="0" cy="0"/>
+        </a:xfrm>
+      </p:grpSpPr>
+      <p:sp>
+        <p:nvSpPr>
+          <p:cNvPr id="2" name="Slide Image Placeholder 1"/>
+          <p:cNvSpPr>
+            <a:spLocks noGrp="1" noRot="1" noChangeAspect="1"/>
+          </p:cNvSpPr>
+          <p:nvPr>
+            <p:ph type="sldImg"/>
+          </p:nvPr>
+        </p:nvSpPr>
+        <p:spPr/>
+      </p:sp>
+      <p:sp>
+        <p:nvSpPr>
+          <p:cNvPr id="3" name="Notes Placeholder 2"/>
+          <p:cNvSpPr>
+            <a:spLocks noGrp="1"/>
+          </p:cNvSpPr>
+          <p:nvPr>
+            <p:ph type="body" idx="1"/>
+          </p:nvPr>
+        </p:nvSpPr>
+        <p:spPr/>
+        <p:txBody>
+          <a:bodyPr/>
+          <a:lstStyle/>
+          <a:p>
+            <a:r>
+              <a:rPr lang="en-US" dirty="0"/>
+              <a:t/>
+            </a:r>
+            <a:endParaRPr lang="en-US" dirty="0"/>
+          </a:p>
+        </p:txBody>
+      </p:sp>
+      <p:sp>
+        <p:nvSpPr>
+          <p:cNvPr id="4" name="Slide Number Placeholder 3"/>
+          <p:cNvSpPr>
+            <a:spLocks noGrp="1"/>
+          </p:cNvSpPr>
+          <p:nvPr>
+            <p:ph type="sldNum" sz="quarter" idx="10"/>
+          </p:nvPr>
+        </p:nvSpPr>
+        <p:spPr/>
+        <p:txBody>
+          <a:bodyPr/>
+          <a:lstStyle/>
+          <a:p>
+            <a:fld id="{F7021451-1387-4CA6-816F-3879F97B5CBC}" type="slidenum">
+              <a:rPr lang="en-US"/>
+              <a:t>29</a:t>
             </a:fld>
             <a:endParaRPr lang="en-US"/>
           </a:p>
@@ -16046,7 +16135,7 @@
                 <a:ea typeface="Yu Gothic" pitchFamily="34" charset="-122"/>
                 <a:cs typeface="Yu Gothic" pitchFamily="34" charset="-120"/>
               </a:rPr>
-              <a:t>13回を通じて、繰り返し現れた考え方</a:t>
+              <a:t>一本の線</a:t>
             </a:r>
             <a:endParaRPr lang="en-US" sz="3000" dirty="0"/>
           </a:p>
@@ -16093,22 +16182,64 @@
       </p:sp>
       <p:sp>
         <p:nvSpPr>
-          <p:cNvPr id="5" name="Shape 3"/>
+          <p:cNvPr id="5" name="Text 3"/>
           <p:cNvSpPr/>
           <p:nvPr/>
         </p:nvSpPr>
         <p:spPr>
           <a:xfrm>
             <a:off x="685800" y="1481328"/>
-            <a:ext cx="3444240" cy="1371600"/>
+            <a:ext cx="10789920" cy="365760"/>
+          </a:xfrm>
+          <a:prstGeom prst="rect">
+            <a:avLst/>
+          </a:prstGeom>
+          <a:noFill/>
+          <a:ln/>
+        </p:spPr>
+        <p:txBody>
+          <a:bodyPr wrap="square" lIns="0" tIns="0" rIns="0" bIns="0" rtlCol="0" anchor="ctr"/>
+          <a:lstStyle/>
+          <a:p>
+            <a:pPr indent="0" marL="0">
+              <a:lnSpc>
+                <a:spcPts val="2200"/>
+              </a:lnSpc>
+              <a:buNone/>
+            </a:pPr>
+            <a:r>
+              <a:rPr lang="en-US" sz="1500" dirty="0">
+                <a:solidFill>
+                  <a:srgbClr val="16191D"/>
+                </a:solidFill>
+                <a:latin typeface="Yu Gothic" pitchFamily="34" charset="0"/>
+                <a:ea typeface="Yu Gothic" pitchFamily="34" charset="-122"/>
+                <a:cs typeface="Yu Gothic" pitchFamily="34" charset="-120"/>
+              </a:rPr>
+              <a:t>13回で追いかけてきたものを並べ直す。各回の「今回の問い」の答えが、ここにつながっている。</a:t>
+            </a:r>
+            <a:endParaRPr lang="en-US" sz="1500" dirty="0"/>
+          </a:p>
+        </p:txBody>
+      </p:sp>
+      <p:sp>
+        <p:nvSpPr>
+          <p:cNvPr id="6" name="Shape 4"/>
+          <p:cNvSpPr/>
+          <p:nvPr/>
+        </p:nvSpPr>
+        <p:spPr>
+          <a:xfrm>
+            <a:off x="685800" y="1883664"/>
+            <a:ext cx="10789920" cy="3931920"/>
           </a:xfrm>
           <a:prstGeom prst="roundRect">
             <a:avLst>
-              <a:gd name="adj" fmla="val 4000"/>
+              <a:gd name="adj" fmla="val 930"/>
             </a:avLst>
           </a:prstGeom>
           <a:solidFill>
-            <a:srgbClr val="EEF1F5"/>
+            <a:srgbClr val="F5F7FA"/>
           </a:solidFill>
           <a:ln w="12700">
             <a:solidFill>
@@ -16120,53 +16251,14 @@
       </p:sp>
       <p:sp>
         <p:nvSpPr>
-          <p:cNvPr id="6" name="Text 4"/>
-          <p:cNvSpPr/>
-          <p:nvPr/>
-        </p:nvSpPr>
-        <p:spPr>
-          <a:xfrm>
-            <a:off x="868680" y="1618488"/>
-            <a:ext cx="3078480" cy="310896"/>
-          </a:xfrm>
-          <a:prstGeom prst="rect">
-            <a:avLst/>
-          </a:prstGeom>
-          <a:noFill/>
-          <a:ln/>
-        </p:spPr>
-        <p:txBody>
-          <a:bodyPr wrap="square" lIns="0" tIns="0" rIns="0" bIns="0" rtlCol="0" anchor="ctr"/>
-          <a:lstStyle/>
-          <a:p>
-            <a:pPr indent="0" marL="0">
-              <a:buNone/>
-            </a:pPr>
-            <a:r>
-              <a:rPr lang="en-US" sz="1400" b="1" dirty="0">
-                <a:solidFill>
-                  <a:srgbClr val="16191D"/>
-                </a:solidFill>
-                <a:latin typeface="Yu Gothic" pitchFamily="34" charset="0"/>
-                <a:ea typeface="Yu Gothic" pitchFamily="34" charset="-122"/>
-                <a:cs typeface="Yu Gothic" pitchFamily="34" charset="-120"/>
-              </a:rPr>
-              <a:t>抽象化と階層</a:t>
-            </a:r>
-            <a:endParaRPr lang="en-US" sz="1400" dirty="0"/>
-          </a:p>
-        </p:txBody>
-      </p:sp>
-      <p:sp>
-        <p:nvSpPr>
           <p:cNvPr id="7" name="Text 5"/>
           <p:cNvSpPr/>
           <p:nvPr/>
         </p:nvSpPr>
         <p:spPr>
           <a:xfrm>
-            <a:off x="868680" y="1965960"/>
-            <a:ext cx="3078480" cy="731520"/>
+            <a:off x="886968" y="2029968"/>
+            <a:ext cx="10387584" cy="3639312"/>
           </a:xfrm>
           <a:prstGeom prst="rect">
             <a:avLst/>
@@ -16180,574 +16272,274 @@
           <a:p>
             <a:pPr indent="0" marL="0">
               <a:lnSpc>
-                <a:spcPts val="1600"/>
+                <a:spcPts val="1725"/>
               </a:lnSpc>
               <a:buNone/>
             </a:pPr>
             <a:r>
-              <a:rPr lang="en-US" sz="1200" dirty="0">
-                <a:solidFill>
-                  <a:srgbClr val="5F6672"/>
-                </a:solidFill>
-                <a:latin typeface="Yu Gothic" pitchFamily="34" charset="0"/>
-                <a:ea typeface="Yu Gothic" pitchFamily="34" charset="-122"/>
-                <a:cs typeface="Yu Gothic" pitchFamily="34" charset="-120"/>
-              </a:rPr>
-              <a:t>ゲート→CPU、機械語→高級言語、物理層→アプリ層。各層は下の詳細を知らずに仕事ができる</a:t>
-            </a:r>
-            <a:endParaRPr lang="en-US" sz="1200" dirty="0"/>
-          </a:p>
-        </p:txBody>
-      </p:sp>
-      <p:sp>
-        <p:nvSpPr>
-          <p:cNvPr id="8" name="Shape 6"/>
-          <p:cNvSpPr/>
-          <p:nvPr/>
-        </p:nvSpPr>
-        <p:spPr>
-          <a:xfrm>
-            <a:off x="4358640" y="1481328"/>
-            <a:ext cx="3444240" cy="1371600"/>
-          </a:xfrm>
-          <a:prstGeom prst="roundRect">
-            <a:avLst>
-              <a:gd name="adj" fmla="val 4000"/>
-            </a:avLst>
-          </a:prstGeom>
-          <a:solidFill>
-            <a:srgbClr val="EEF1F5"/>
-          </a:solidFill>
-          <a:ln w="12700">
-            <a:solidFill>
-              <a:srgbClr val="DDE4EC"/>
-            </a:solidFill>
-            <a:prstDash val="solid"/>
-          </a:ln>
-        </p:spPr>
-      </p:sp>
-      <p:sp>
-        <p:nvSpPr>
-          <p:cNvPr id="9" name="Text 7"/>
-          <p:cNvSpPr/>
-          <p:nvPr/>
-        </p:nvSpPr>
-        <p:spPr>
-          <a:xfrm>
-            <a:off x="4541520" y="1618488"/>
-            <a:ext cx="3078480" cy="310896"/>
-          </a:xfrm>
-          <a:prstGeom prst="rect">
-            <a:avLst/>
-          </a:prstGeom>
-          <a:noFill/>
-          <a:ln/>
-        </p:spPr>
-        <p:txBody>
-          <a:bodyPr wrap="square" lIns="0" tIns="0" rIns="0" bIns="0" rtlCol="0" anchor="ctr"/>
-          <a:lstStyle/>
-          <a:p>
-            <a:pPr indent="0" marL="0">
-              <a:buNone/>
-            </a:pPr>
-            <a:r>
-              <a:rPr lang="en-US" sz="1400" b="1" dirty="0">
+              <a:rPr lang="en-US" sz="1150" dirty="0">
                 <a:solidFill>
                   <a:srgbClr val="16191D"/>
                 </a:solidFill>
-                <a:latin typeface="Yu Gothic" pitchFamily="34" charset="0"/>
-                <a:ea typeface="Yu Gothic" pitchFamily="34" charset="-122"/>
-                <a:cs typeface="Yu Gothic" pitchFamily="34" charset="-120"/>
-              </a:rPr>
-              <a:t>対応表を挟んで幻を見せる</a:t>
-            </a:r>
-            <a:endParaRPr lang="en-US" sz="1400" dirty="0"/>
-          </a:p>
-        </p:txBody>
-      </p:sp>
-      <p:sp>
-        <p:nvSpPr>
-          <p:cNvPr id="10" name="Text 8"/>
-          <p:cNvSpPr/>
-          <p:nvPr/>
-        </p:nvSpPr>
-        <p:spPr>
-          <a:xfrm>
-            <a:off x="4541520" y="1965960"/>
-            <a:ext cx="3078480" cy="731520"/>
-          </a:xfrm>
-          <a:prstGeom prst="rect">
-            <a:avLst/>
-          </a:prstGeom>
-          <a:noFill/>
-          <a:ln/>
-        </p:spPr>
-        <p:txBody>
-          <a:bodyPr wrap="square" lIns="0" tIns="0" rIns="0" bIns="0" rtlCol="0" anchor="t"/>
-          <a:lstStyle/>
+                <a:latin typeface="Courier New" pitchFamily="34" charset="0"/>
+                <a:ea typeface="Courier New" pitchFamily="34" charset="-122"/>
+                <a:cs typeface="Courier New" pitchFamily="34" charset="-120"/>
+              </a:rPr>
+              <a:t>第1回  計算とは何か             チューリングマシン、計算の限界</a:t>
+            </a:r>
+            <a:endParaRPr lang="en-US" sz="1150" dirty="0"/>
+          </a:p>
           <a:p>
             <a:pPr indent="0" marL="0">
               <a:lnSpc>
-                <a:spcPts val="1600"/>
+                <a:spcPts val="1725"/>
               </a:lnSpc>
               <a:buNone/>
             </a:pPr>
             <a:r>
-              <a:rPr lang="en-US" sz="1200" dirty="0">
-                <a:solidFill>
-                  <a:srgbClr val="5F6672"/>
-                </a:solidFill>
-                <a:latin typeface="Yu Gothic" pitchFamily="34" charset="0"/>
-                <a:ea typeface="Yu Gothic" pitchFamily="34" charset="-122"/>
-                <a:cs typeface="Yu Gothic" pitchFamily="34" charset="-120"/>
-              </a:rPr>
-              <a:t>仮想記憶、SSD の変換、ファイルシステム、DNS、NAT、仮想化</a:t>
-            </a:r>
-            <a:endParaRPr lang="en-US" sz="1200" dirty="0"/>
-          </a:p>
-        </p:txBody>
-      </p:sp>
-      <p:sp>
-        <p:nvSpPr>
-          <p:cNvPr id="11" name="Shape 9"/>
-          <p:cNvSpPr/>
-          <p:nvPr/>
-        </p:nvSpPr>
-        <p:spPr>
-          <a:xfrm>
-            <a:off x="8031480" y="1481328"/>
-            <a:ext cx="3444240" cy="1371600"/>
-          </a:xfrm>
-          <a:prstGeom prst="roundRect">
-            <a:avLst>
-              <a:gd name="adj" fmla="val 4000"/>
-            </a:avLst>
-          </a:prstGeom>
-          <a:solidFill>
-            <a:srgbClr val="EEF1F5"/>
-          </a:solidFill>
-          <a:ln w="12700">
-            <a:solidFill>
-              <a:srgbClr val="DDE4EC"/>
-            </a:solidFill>
-            <a:prstDash val="solid"/>
-          </a:ln>
-        </p:spPr>
-      </p:sp>
-      <p:sp>
-        <p:nvSpPr>
-          <p:cNvPr id="12" name="Text 10"/>
-          <p:cNvSpPr/>
-          <p:nvPr/>
-        </p:nvSpPr>
-        <p:spPr>
-          <a:xfrm>
-            <a:off x="8214360" y="1618488"/>
-            <a:ext cx="3078480" cy="310896"/>
-          </a:xfrm>
-          <a:prstGeom prst="rect">
-            <a:avLst/>
-          </a:prstGeom>
-          <a:noFill/>
-          <a:ln/>
-        </p:spPr>
-        <p:txBody>
-          <a:bodyPr wrap="square" lIns="0" tIns="0" rIns="0" bIns="0" rtlCol="0" anchor="ctr"/>
-          <a:lstStyle/>
-          <a:p>
-            <a:pPr indent="0" marL="0">
-              <a:buNone/>
-            </a:pPr>
-            <a:r>
-              <a:rPr lang="en-US" sz="1400" b="1" dirty="0">
+              <a:rPr lang="en-US" sz="1150" dirty="0">
                 <a:solidFill>
                   <a:srgbClr val="16191D"/>
                 </a:solidFill>
-                <a:latin typeface="Yu Gothic" pitchFamily="34" charset="0"/>
-                <a:ea typeface="Yu Gothic" pitchFamily="34" charset="-122"/>
-                <a:cs typeface="Yu Gothic" pitchFamily="34" charset="-120"/>
-              </a:rPr>
-              <a:t>局所性とキャッシュ</a:t>
-            </a:r>
-            <a:endParaRPr lang="en-US" sz="1400" dirty="0"/>
-          </a:p>
-        </p:txBody>
-      </p:sp>
-      <p:sp>
-        <p:nvSpPr>
-          <p:cNvPr id="13" name="Text 11"/>
-          <p:cNvSpPr/>
-          <p:nvPr/>
-        </p:nvSpPr>
-        <p:spPr>
-          <a:xfrm>
-            <a:off x="8214360" y="1965960"/>
-            <a:ext cx="3078480" cy="731520"/>
-          </a:xfrm>
-          <a:prstGeom prst="rect">
-            <a:avLst/>
-          </a:prstGeom>
-          <a:noFill/>
-          <a:ln/>
-        </p:spPr>
-        <p:txBody>
-          <a:bodyPr wrap="square" lIns="0" tIns="0" rIns="0" bIns="0" rtlCol="0" anchor="t"/>
-          <a:lstStyle/>
+                <a:latin typeface="Courier New" pitchFamily="34" charset="0"/>
+                <a:ea typeface="Courier New" pitchFamily="34" charset="-122"/>
+                <a:cs typeface="Courier New" pitchFamily="34" charset="-120"/>
+              </a:rPr>
+              <a:t>第2回  情報の表現と計算量       2進数、O記法、P と NP</a:t>
+            </a:r>
+            <a:endParaRPr lang="en-US" sz="1150" dirty="0"/>
+          </a:p>
           <a:p>
             <a:pPr indent="0" marL="0">
               <a:lnSpc>
-                <a:spcPts val="1600"/>
+                <a:spcPts val="1725"/>
               </a:lnSpc>
               <a:buNone/>
             </a:pPr>
             <a:r>
-              <a:rPr lang="en-US" sz="1200" dirty="0">
-                <a:solidFill>
-                  <a:srgbClr val="5F6672"/>
-                </a:solidFill>
-                <a:latin typeface="Yu Gothic" pitchFamily="34" charset="0"/>
-                <a:ea typeface="Yu Gothic" pitchFamily="34" charset="-122"/>
-                <a:cs typeface="Yu Gothic" pitchFamily="34" charset="-120"/>
-              </a:rPr>
-              <a:t>CPU キャッシュ、ページング、DNS、CDN、DB のバッファ。あらゆる規模で同じ解法</a:t>
-            </a:r>
-            <a:endParaRPr lang="en-US" sz="1200" dirty="0"/>
-          </a:p>
-        </p:txBody>
-      </p:sp>
-      <p:sp>
-        <p:nvSpPr>
-          <p:cNvPr id="14" name="Shape 12"/>
-          <p:cNvSpPr/>
-          <p:nvPr/>
-        </p:nvSpPr>
-        <p:spPr>
-          <a:xfrm>
-            <a:off x="685800" y="3054096"/>
-            <a:ext cx="3444240" cy="1371600"/>
-          </a:xfrm>
-          <a:prstGeom prst="roundRect">
-            <a:avLst>
-              <a:gd name="adj" fmla="val 4000"/>
-            </a:avLst>
-          </a:prstGeom>
-          <a:solidFill>
-            <a:srgbClr val="EEF1F5"/>
-          </a:solidFill>
-          <a:ln w="12700">
-            <a:solidFill>
-              <a:srgbClr val="DDE4EC"/>
-            </a:solidFill>
-            <a:prstDash val="solid"/>
-          </a:ln>
-        </p:spPr>
-      </p:sp>
-      <p:sp>
-        <p:nvSpPr>
-          <p:cNvPr id="15" name="Text 13"/>
-          <p:cNvSpPr/>
-          <p:nvPr/>
-        </p:nvSpPr>
-        <p:spPr>
-          <a:xfrm>
-            <a:off x="868680" y="3191256"/>
-            <a:ext cx="3078480" cy="310896"/>
-          </a:xfrm>
-          <a:prstGeom prst="rect">
-            <a:avLst/>
-          </a:prstGeom>
-          <a:noFill/>
-          <a:ln/>
-        </p:spPr>
-        <p:txBody>
-          <a:bodyPr wrap="square" lIns="0" tIns="0" rIns="0" bIns="0" rtlCol="0" anchor="ctr"/>
-          <a:lstStyle/>
-          <a:p>
-            <a:pPr indent="0" marL="0">
-              <a:buNone/>
-            </a:pPr>
-            <a:r>
-              <a:rPr lang="en-US" sz="1400" b="1" dirty="0">
+              <a:rPr lang="en-US" sz="1150" dirty="0">
                 <a:solidFill>
                   <a:srgbClr val="16191D"/>
                 </a:solidFill>
-                <a:latin typeface="Yu Gothic" pitchFamily="34" charset="0"/>
-                <a:ea typeface="Yu Gothic" pitchFamily="34" charset="-122"/>
-                <a:cs typeface="Yu Gothic" pitchFamily="34" charset="-120"/>
-              </a:rPr>
-              <a:t>端点に賢さを置く</a:t>
-            </a:r>
-            <a:endParaRPr lang="en-US" sz="1400" dirty="0"/>
-          </a:p>
-        </p:txBody>
-      </p:sp>
-      <p:sp>
-        <p:nvSpPr>
-          <p:cNvPr id="16" name="Text 14"/>
-          <p:cNvSpPr/>
-          <p:nvPr/>
-        </p:nvSpPr>
-        <p:spPr>
-          <a:xfrm>
-            <a:off x="868680" y="3538728"/>
-            <a:ext cx="3078480" cy="731520"/>
-          </a:xfrm>
-          <a:prstGeom prst="rect">
-            <a:avLst/>
-          </a:prstGeom>
-          <a:noFill/>
-          <a:ln/>
-        </p:spPr>
-        <p:txBody>
-          <a:bodyPr wrap="square" lIns="0" tIns="0" rIns="0" bIns="0" rtlCol="0" anchor="t"/>
-          <a:lstStyle/>
+                <a:latin typeface="Courier New" pitchFamily="34" charset="0"/>
+                <a:ea typeface="Courier New" pitchFamily="34" charset="-122"/>
+                <a:cs typeface="Courier New" pitchFamily="34" charset="-120"/>
+              </a:rPr>
+              <a:t>第3回  論理回路からプロセッサへ  ゲート、加算器、ノイマン型、ムーアの法則</a:t>
+            </a:r>
+            <a:endParaRPr lang="en-US" sz="1150" dirty="0"/>
+          </a:p>
           <a:p>
             <a:pPr indent="0" marL="0">
               <a:lnSpc>
-                <a:spcPts val="1600"/>
+                <a:spcPts val="1725"/>
               </a:lnSpc>
               <a:buNone/>
             </a:pPr>
             <a:r>
-              <a:rPr lang="en-US" sz="1200" dirty="0">
-                <a:solidFill>
-                  <a:srgbClr val="5F6672"/>
-                </a:solidFill>
-                <a:latin typeface="Yu Gothic" pitchFamily="34" charset="0"/>
-                <a:ea typeface="Yu Gothic" pitchFamily="34" charset="-122"/>
-                <a:cs typeface="Yu Gothic" pitchFamily="34" charset="-120"/>
-              </a:rPr>
-              <a:t>TCP の信頼性と輻輳制御。網は単純に、賢さは端に</a:t>
-            </a:r>
-            <a:endParaRPr lang="en-US" sz="1200" dirty="0"/>
-          </a:p>
-        </p:txBody>
-      </p:sp>
-      <p:sp>
-        <p:nvSpPr>
-          <p:cNvPr id="17" name="Shape 15"/>
-          <p:cNvSpPr/>
-          <p:nvPr/>
-        </p:nvSpPr>
-        <p:spPr>
-          <a:xfrm>
-            <a:off x="4358640" y="3054096"/>
-            <a:ext cx="3444240" cy="1371600"/>
-          </a:xfrm>
-          <a:prstGeom prst="roundRect">
-            <a:avLst>
-              <a:gd name="adj" fmla="val 4000"/>
-            </a:avLst>
-          </a:prstGeom>
-          <a:solidFill>
-            <a:srgbClr val="EEF1F5"/>
-          </a:solidFill>
-          <a:ln w="12700">
-            <a:solidFill>
-              <a:srgbClr val="DDE4EC"/>
-            </a:solidFill>
-            <a:prstDash val="solid"/>
-          </a:ln>
-        </p:spPr>
-      </p:sp>
-      <p:sp>
-        <p:nvSpPr>
-          <p:cNvPr id="18" name="Text 16"/>
-          <p:cNvSpPr/>
-          <p:nvPr/>
-        </p:nvSpPr>
-        <p:spPr>
-          <a:xfrm>
-            <a:off x="4541520" y="3191256"/>
-            <a:ext cx="3078480" cy="310896"/>
-          </a:xfrm>
-          <a:prstGeom prst="rect">
-            <a:avLst/>
-          </a:prstGeom>
-          <a:noFill/>
-          <a:ln/>
-        </p:spPr>
-        <p:txBody>
-          <a:bodyPr wrap="square" lIns="0" tIns="0" rIns="0" bIns="0" rtlCol="0" anchor="ctr"/>
-          <a:lstStyle/>
-          <a:p>
-            <a:pPr indent="0" marL="0">
-              <a:buNone/>
-            </a:pPr>
-            <a:r>
-              <a:rPr lang="en-US" sz="1400" b="1" dirty="0">
+              <a:rPr lang="en-US" sz="1150" dirty="0">
                 <a:solidFill>
                   <a:srgbClr val="16191D"/>
                 </a:solidFill>
-                <a:latin typeface="Yu Gothic" pitchFamily="34" charset="0"/>
-                <a:ea typeface="Yu Gothic" pitchFamily="34" charset="-122"/>
-                <a:cs typeface="Yu Gothic" pitchFamily="34" charset="-120"/>
-              </a:rPr>
-              <a:t>データとコードの境界</a:t>
-            </a:r>
-            <a:endParaRPr lang="en-US" sz="1400" dirty="0"/>
-          </a:p>
-        </p:txBody>
-      </p:sp>
-      <p:sp>
-        <p:nvSpPr>
-          <p:cNvPr id="19" name="Text 17"/>
-          <p:cNvSpPr/>
-          <p:nvPr/>
-        </p:nvSpPr>
-        <p:spPr>
-          <a:xfrm>
-            <a:off x="4541520" y="3538728"/>
-            <a:ext cx="3078480" cy="731520"/>
-          </a:xfrm>
-          <a:prstGeom prst="rect">
-            <a:avLst/>
-          </a:prstGeom>
-          <a:noFill/>
-          <a:ln/>
-        </p:spPr>
-        <p:txBody>
-          <a:bodyPr wrap="square" lIns="0" tIns="0" rIns="0" bIns="0" rtlCol="0" anchor="t"/>
-          <a:lstStyle/>
+                <a:latin typeface="Courier New" pitchFamily="34" charset="0"/>
+                <a:ea typeface="Courier New" pitchFamily="34" charset="-122"/>
+                <a:cs typeface="Courier New" pitchFamily="34" charset="-120"/>
+              </a:rPr>
+              <a:t>第4回  プログラムが動くまで      機械語、高級言語、処理系</a:t>
+            </a:r>
+            <a:endParaRPr lang="en-US" sz="1150" dirty="0"/>
+          </a:p>
           <a:p>
             <a:pPr indent="0" marL="0">
               <a:lnSpc>
-                <a:spcPts val="1600"/>
+                <a:spcPts val="1725"/>
               </a:lnSpc>
               <a:buNone/>
             </a:pPr>
             <a:r>
-              <a:rPr lang="en-US" sz="1200" dirty="0">
-                <a:solidFill>
-                  <a:srgbClr val="5F6672"/>
-                </a:solidFill>
-                <a:latin typeface="Yu Gothic" pitchFamily="34" charset="0"/>
-                <a:ea typeface="Yu Gothic" pitchFamily="34" charset="-122"/>
-                <a:cs typeface="Yu Gothic" pitchFamily="34" charset="-120"/>
-              </a:rPr>
-              <a:t>ノイマン型の力と危うさ。SQLi、XSS、そしてプロンプトインジェクション</a:t>
-            </a:r>
-            <a:endParaRPr lang="en-US" sz="1200" dirty="0"/>
-          </a:p>
-        </p:txBody>
-      </p:sp>
-      <p:sp>
-        <p:nvSpPr>
-          <p:cNvPr id="20" name="Shape 18"/>
-          <p:cNvSpPr/>
-          <p:nvPr/>
-        </p:nvSpPr>
-        <p:spPr>
-          <a:xfrm>
-            <a:off x="8031480" y="3054096"/>
-            <a:ext cx="3444240" cy="1371600"/>
-          </a:xfrm>
-          <a:prstGeom prst="roundRect">
-            <a:avLst>
-              <a:gd name="adj" fmla="val 4000"/>
-            </a:avLst>
-          </a:prstGeom>
-          <a:solidFill>
-            <a:srgbClr val="EEF1F5"/>
-          </a:solidFill>
-          <a:ln w="12700">
-            <a:solidFill>
-              <a:srgbClr val="DDE4EC"/>
-            </a:solidFill>
-            <a:prstDash val="solid"/>
-          </a:ln>
-        </p:spPr>
-      </p:sp>
-      <p:sp>
-        <p:nvSpPr>
-          <p:cNvPr id="21" name="Text 19"/>
-          <p:cNvSpPr/>
-          <p:nvPr/>
-        </p:nvSpPr>
-        <p:spPr>
-          <a:xfrm>
-            <a:off x="8214360" y="3191256"/>
-            <a:ext cx="3078480" cy="310896"/>
-          </a:xfrm>
-          <a:prstGeom prst="rect">
-            <a:avLst/>
-          </a:prstGeom>
-          <a:noFill/>
-          <a:ln/>
-        </p:spPr>
-        <p:txBody>
-          <a:bodyPr wrap="square" lIns="0" tIns="0" rIns="0" bIns="0" rtlCol="0" anchor="ctr"/>
-          <a:lstStyle/>
-          <a:p>
-            <a:pPr indent="0" marL="0">
-              <a:buNone/>
-            </a:pPr>
-            <a:r>
-              <a:rPr lang="en-US" sz="1400" b="1" dirty="0">
+              <a:rPr lang="en-US" sz="1150" dirty="0">
                 <a:solidFill>
                   <a:srgbClr val="16191D"/>
                 </a:solidFill>
-                <a:latin typeface="Yu Gothic" pitchFamily="34" charset="0"/>
-                <a:ea typeface="Yu Gothic" pitchFamily="34" charset="-122"/>
-                <a:cs typeface="Yu Gothic" pitchFamily="34" charset="-120"/>
-              </a:rPr>
-              <a:t>限界を知って迂回する</a:t>
-            </a:r>
-            <a:endParaRPr lang="en-US" sz="1400" dirty="0"/>
-          </a:p>
-        </p:txBody>
-      </p:sp>
-      <p:sp>
-        <p:nvSpPr>
-          <p:cNvPr id="22" name="Text 20"/>
-          <p:cNvSpPr/>
-          <p:nvPr/>
-        </p:nvSpPr>
-        <p:spPr>
-          <a:xfrm>
-            <a:off x="8214360" y="3538728"/>
-            <a:ext cx="3078480" cy="731520"/>
-          </a:xfrm>
-          <a:prstGeom prst="rect">
-            <a:avLst/>
-          </a:prstGeom>
-          <a:noFill/>
-          <a:ln/>
-        </p:spPr>
-        <p:txBody>
-          <a:bodyPr wrap="square" lIns="0" tIns="0" rIns="0" bIns="0" rtlCol="0" anchor="t"/>
-          <a:lstStyle/>
+                <a:latin typeface="Courier New" pitchFamily="34" charset="0"/>
+                <a:ea typeface="Courier New" pitchFamily="34" charset="-122"/>
+                <a:cs typeface="Courier New" pitchFamily="34" charset="-120"/>
+              </a:rPr>
+              <a:t>第5回  記憶階層と並列性         キャッシュ、仮想記憶、パイプライン、GPU</a:t>
+            </a:r>
+            <a:endParaRPr lang="en-US" sz="1150" dirty="0"/>
+          </a:p>
           <a:p>
             <a:pPr indent="0" marL="0">
               <a:lnSpc>
-                <a:spcPts val="1600"/>
+                <a:spcPts val="1725"/>
               </a:lnSpc>
               <a:buNone/>
             </a:pPr>
             <a:r>
-              <a:rPr lang="en-US" sz="1200" dirty="0">
-                <a:solidFill>
-                  <a:srgbClr val="5F6672"/>
-                </a:solidFill>
-                <a:latin typeface="Yu Gothic" pitchFamily="34" charset="0"/>
-                <a:ea typeface="Yu Gothic" pitchFamily="34" charset="-122"/>
-                <a:cs typeface="Yu Gothic" pitchFamily="34" charset="-120"/>
-              </a:rPr>
-              <a:t>停止問題、NP完全、アムダールの法則、CAP 定理</a:t>
-            </a:r>
-            <a:endParaRPr lang="en-US" sz="1200" dirty="0"/>
-          </a:p>
-        </p:txBody>
-      </p:sp>
-      <p:sp>
-        <p:nvSpPr>
-          <p:cNvPr id="23" name="Text 21"/>
-          <p:cNvSpPr/>
-          <p:nvPr/>
-        </p:nvSpPr>
-        <p:spPr>
-          <a:xfrm>
-            <a:off x="685800" y="5212080"/>
+              <a:rPr lang="en-US" sz="1150" dirty="0">
+                <a:solidFill>
+                  <a:srgbClr val="16191D"/>
+                </a:solidFill>
+                <a:latin typeface="Courier New" pitchFamily="34" charset="0"/>
+                <a:ea typeface="Courier New" pitchFamily="34" charset="-122"/>
+                <a:cs typeface="Courier New" pitchFamily="34" charset="-120"/>
+              </a:rPr>
+              <a:t>第6回  ストレージ               HDD、SSD、RAID、分散ストレージ</a:t>
+            </a:r>
+            <a:endParaRPr lang="en-US" sz="1150" dirty="0"/>
+          </a:p>
+          <a:p>
+            <a:pPr indent="0" marL="0">
+              <a:lnSpc>
+                <a:spcPts val="1725"/>
+              </a:lnSpc>
+              <a:buNone/>
+            </a:pPr>
+            <a:r>
+              <a:rPr lang="en-US" sz="1150" dirty="0">
+                <a:solidFill>
+                  <a:srgbClr val="16191D"/>
+                </a:solidFill>
+                <a:latin typeface="Courier New" pitchFamily="34" charset="0"/>
+                <a:ea typeface="Courier New" pitchFamily="34" charset="-122"/>
+                <a:cs typeface="Courier New" pitchFamily="34" charset="-120"/>
+              </a:rPr>
+              <a:t>第7回  OSとプロセス             システムコール、スケジューリング、排他制御</a:t>
+            </a:r>
+            <a:endParaRPr lang="en-US" sz="1150" dirty="0"/>
+          </a:p>
+          <a:p>
+            <a:pPr indent="0" marL="0">
+              <a:lnSpc>
+                <a:spcPts val="1725"/>
+              </a:lnSpc>
+              <a:buNone/>
+            </a:pPr>
+            <a:r>
+              <a:rPr lang="en-US" sz="1150" dirty="0">
+                <a:solidFill>
+                  <a:srgbClr val="16191D"/>
+                </a:solidFill>
+                <a:latin typeface="Courier New" pitchFamily="34" charset="0"/>
+                <a:ea typeface="Courier New" pitchFamily="34" charset="-122"/>
+                <a:cs typeface="Courier New" pitchFamily="34" charset="-120"/>
+              </a:rPr>
+              <a:t>第8回  入出力・仮想化・クラウド  割り込み、DMA、コンテナ、責任共有</a:t>
+            </a:r>
+            <a:endParaRPr lang="en-US" sz="1150" dirty="0"/>
+          </a:p>
+          <a:p>
+            <a:pPr indent="0" marL="0">
+              <a:lnSpc>
+                <a:spcPts val="1725"/>
+              </a:lnSpc>
+              <a:buNone/>
+            </a:pPr>
+            <a:r>
+              <a:rPr lang="en-US" sz="1150" dirty="0">
+                <a:solidFill>
+                  <a:srgbClr val="16191D"/>
+                </a:solidFill>
+                <a:latin typeface="Courier New" pitchFamily="34" charset="0"/>
+                <a:ea typeface="Courier New" pitchFamily="34" charset="-122"/>
+                <a:cs typeface="Courier New" pitchFamily="34" charset="-120"/>
+              </a:rPr>
+              <a:t>第9回  ネットワークの基礎       パケット交換、階層モデル、Ethernet、IP</a:t>
+            </a:r>
+            <a:endParaRPr lang="en-US" sz="1150" dirty="0"/>
+          </a:p>
+          <a:p>
+            <a:pPr indent="0" marL="0">
+              <a:lnSpc>
+                <a:spcPts val="1725"/>
+              </a:lnSpc>
+              <a:buNone/>
+            </a:pPr>
+            <a:r>
+              <a:rPr lang="en-US" sz="1150" dirty="0">
+                <a:solidFill>
+                  <a:srgbClr val="16191D"/>
+                </a:solidFill>
+                <a:latin typeface="Courier New" pitchFamily="34" charset="0"/>
+                <a:ea typeface="Courier New" pitchFamily="34" charset="-122"/>
+                <a:cs typeface="Courier New" pitchFamily="34" charset="-120"/>
+              </a:rPr>
+              <a:t>第10回 インターネットとWeb      TCP、DNS、HTTP、TLS</a:t>
+            </a:r>
+            <a:endParaRPr lang="en-US" sz="1150" dirty="0"/>
+          </a:p>
+          <a:p>
+            <a:pPr indent="0" marL="0">
+              <a:lnSpc>
+                <a:spcPts val="1725"/>
+              </a:lnSpc>
+              <a:buNone/>
+            </a:pPr>
+            <a:r>
+              <a:rPr lang="en-US" sz="1150" dirty="0">
+                <a:solidFill>
+                  <a:srgbClr val="16191D"/>
+                </a:solidFill>
+                <a:latin typeface="Courier New" pitchFamily="34" charset="0"/>
+                <a:ea typeface="Courier New" pitchFamily="34" charset="-122"/>
+                <a:cs typeface="Courier New" pitchFamily="34" charset="-120"/>
+              </a:rPr>
+              <a:t>第11回 データベース             正規化、SQL、ACID、CAP、ベクトル検索</a:t>
+            </a:r>
+            <a:endParaRPr lang="en-US" sz="1150" dirty="0"/>
+          </a:p>
+          <a:p>
+            <a:pPr indent="0" marL="0">
+              <a:lnSpc>
+                <a:spcPts val="1725"/>
+              </a:lnSpc>
+              <a:buNone/>
+            </a:pPr>
+            <a:r>
+              <a:rPr lang="en-US" sz="1150" dirty="0">
+                <a:solidFill>
+                  <a:srgbClr val="16191D"/>
+                </a:solidFill>
+                <a:latin typeface="Courier New" pitchFamily="34" charset="0"/>
+                <a:ea typeface="Courier New" pitchFamily="34" charset="-122"/>
+                <a:cs typeface="Courier New" pitchFamily="34" charset="-120"/>
+              </a:rPr>
+              <a:t>第12回 情報セキュリティ         暗号、証明書、認証と認可、耐量子、ゼロトラスト</a:t>
+            </a:r>
+            <a:endParaRPr lang="en-US" sz="1150" dirty="0"/>
+          </a:p>
+          <a:p>
+            <a:pPr indent="0" marL="0">
+              <a:lnSpc>
+                <a:spcPts val="1725"/>
+              </a:lnSpc>
+              <a:buNone/>
+            </a:pPr>
+            <a:r>
+              <a:rPr lang="en-US" sz="1150" dirty="0">
+                <a:solidFill>
+                  <a:srgbClr val="16191D"/>
+                </a:solidFill>
+                <a:latin typeface="Courier New" pitchFamily="34" charset="0"/>
+                <a:ea typeface="Courier New" pitchFamily="34" charset="-122"/>
+                <a:cs typeface="Courier New" pitchFamily="34" charset="-120"/>
+              </a:rPr>
+              <a:t>第13回 機械学習からエージェントへ 深層学習、トランスフォーマ、LLM、エージェント</a:t>
+            </a:r>
+            <a:endParaRPr lang="en-US" sz="1150" dirty="0"/>
+          </a:p>
+        </p:txBody>
+      </p:sp>
+      <p:sp>
+        <p:nvSpPr>
+          <p:cNvPr id="8" name="Text 6"/>
+          <p:cNvSpPr/>
+          <p:nvPr/>
+        </p:nvSpPr>
+        <p:spPr>
+          <a:xfrm>
+            <a:off x="685800" y="5943600"/>
             <a:ext cx="10789920" cy="512064"/>
           </a:xfrm>
           <a:prstGeom prst="rect">
@@ -16775,7 +16567,7 @@
                 <a:ea typeface="Yu Gothic" pitchFamily="34" charset="-122"/>
                 <a:cs typeface="Yu Gothic" pitchFamily="34" charset="-120"/>
               </a:rPr>
-              <a:t>原理的な限界を知ることは、諦めることではない。正しい迂回路を選ぶために知る。</a:t>
+              <a:t>毎回書いてきたポートフォリオを、ここで見返してほしい。</a:t>
             </a:r>
             <a:endParaRPr lang="en-US" sz="1300" dirty="0"/>
           </a:p>
@@ -16885,7 +16677,7 @@
                 <a:ea typeface="Yu Gothic" pitchFamily="34" charset="-122"/>
                 <a:cs typeface="Yu Gothic" pitchFamily="34" charset="-120"/>
               </a:rPr>
-              <a:t>最後に</a:t>
+              <a:t>13回を通じて、繰り返し現れた考え方</a:t>
             </a:r>
             <a:endParaRPr lang="en-US" sz="3000" dirty="0"/>
           </a:p>
@@ -16932,68 +16724,26 @@
       </p:sp>
       <p:sp>
         <p:nvSpPr>
-          <p:cNvPr id="5" name="Text 3"/>
+          <p:cNvPr id="5" name="Shape 3"/>
           <p:cNvSpPr/>
           <p:nvPr/>
         </p:nvSpPr>
         <p:spPr>
           <a:xfrm>
             <a:off x="685800" y="1481328"/>
-            <a:ext cx="10789920" cy="566928"/>
-          </a:xfrm>
-          <a:prstGeom prst="rect">
-            <a:avLst/>
-          </a:prstGeom>
-          <a:noFill/>
-          <a:ln/>
-        </p:spPr>
-        <p:txBody>
-          <a:bodyPr wrap="square" lIns="0" tIns="0" rIns="0" bIns="0" rtlCol="0" anchor="ctr"/>
-          <a:lstStyle/>
-          <a:p>
-            <a:pPr indent="0" marL="0">
-              <a:lnSpc>
-                <a:spcPts val="2200"/>
-              </a:lnSpc>
-              <a:buNone/>
-            </a:pPr>
-            <a:r>
-              <a:rPr lang="en-US" sz="1500" dirty="0">
-                <a:solidFill>
-                  <a:srgbClr val="16191D"/>
-                </a:solidFill>
-                <a:latin typeface="Yu Gothic" pitchFamily="34" charset="0"/>
-                <a:ea typeface="Yu Gothic" pitchFamily="34" charset="-122"/>
-                <a:cs typeface="Yu Gothic" pitchFamily="34" charset="-120"/>
-              </a:rPr>
-              <a:t>第1回で述べたとおり、この講義は機器のカタログを読むための科目ではない。CPU の型番も通信規格の数字も、数年で入れ替わる。</a:t>
-            </a:r>
-            <a:endParaRPr lang="en-US" sz="1500" dirty="0"/>
-          </a:p>
-        </p:txBody>
-      </p:sp>
-      <p:sp>
-        <p:nvSpPr>
-          <p:cNvPr id="6" name="Shape 4"/>
-          <p:cNvSpPr/>
-          <p:nvPr/>
-        </p:nvSpPr>
-        <p:spPr>
-          <a:xfrm>
-            <a:off x="685800" y="2130552"/>
-            <a:ext cx="10789920" cy="713232"/>
+            <a:ext cx="3444240" cy="1371600"/>
           </a:xfrm>
           <a:prstGeom prst="roundRect">
             <a:avLst>
-              <a:gd name="adj" fmla="val 7692"/>
+              <a:gd name="adj" fmla="val 4000"/>
             </a:avLst>
           </a:prstGeom>
           <a:solidFill>
-            <a:srgbClr val="D9E6F4"/>
-          </a:solidFill>
-          <a:ln w="19050">
+            <a:srgbClr val="EEF1F5"/>
+          </a:solidFill>
+          <a:ln w="12700">
             <a:solidFill>
-              <a:srgbClr val="0B5CAD"/>
+              <a:srgbClr val="DDE4EC"/>
             </a:solidFill>
             <a:prstDash val="solid"/>
           </a:ln>
@@ -17001,464 +16751,72 @@
       </p:sp>
       <p:sp>
         <p:nvSpPr>
+          <p:cNvPr id="6" name="Text 4"/>
+          <p:cNvSpPr/>
+          <p:nvPr/>
+        </p:nvSpPr>
+        <p:spPr>
+          <a:xfrm>
+            <a:off x="868680" y="1618488"/>
+            <a:ext cx="3078480" cy="310896"/>
+          </a:xfrm>
+          <a:prstGeom prst="rect">
+            <a:avLst/>
+          </a:prstGeom>
+          <a:noFill/>
+          <a:ln/>
+        </p:spPr>
+        <p:txBody>
+          <a:bodyPr wrap="square" lIns="0" tIns="0" rIns="0" bIns="0" rtlCol="0" anchor="ctr"/>
+          <a:lstStyle/>
+          <a:p>
+            <a:pPr indent="0" marL="0">
+              <a:buNone/>
+            </a:pPr>
+            <a:r>
+              <a:rPr lang="en-US" sz="1400" b="1" dirty="0">
+                <a:solidFill>
+                  <a:srgbClr val="16191D"/>
+                </a:solidFill>
+                <a:latin typeface="Yu Gothic" pitchFamily="34" charset="0"/>
+                <a:ea typeface="Yu Gothic" pitchFamily="34" charset="-122"/>
+                <a:cs typeface="Yu Gothic" pitchFamily="34" charset="-120"/>
+              </a:rPr>
+              <a:t>抽象化と階層</a:t>
+            </a:r>
+            <a:endParaRPr lang="en-US" sz="1400" dirty="0"/>
+          </a:p>
+        </p:txBody>
+      </p:sp>
+      <p:sp>
+        <p:nvSpPr>
           <p:cNvPr id="7" name="Text 5"/>
           <p:cNvSpPr/>
           <p:nvPr/>
         </p:nvSpPr>
         <p:spPr>
           <a:xfrm>
-            <a:off x="914400" y="2286000"/>
-            <a:ext cx="10332720" cy="402336"/>
-          </a:xfrm>
-          <a:prstGeom prst="rect">
-            <a:avLst/>
-          </a:prstGeom>
-          <a:noFill/>
-          <a:ln/>
-        </p:spPr>
-        <p:txBody>
-          <a:bodyPr wrap="square" lIns="0" tIns="0" rIns="0" bIns="0" rtlCol="0" anchor="ctr"/>
-          <a:lstStyle/>
-          <a:p>
-            <a:pPr indent="0" marL="0">
-              <a:buNone/>
-            </a:pPr>
-            <a:r>
-              <a:rPr lang="en-US" sz="1700" b="1" dirty="0">
-                <a:solidFill>
-                  <a:srgbClr val="0B5CAD"/>
-                </a:solidFill>
-                <a:latin typeface="Yu Gothic" pitchFamily="34" charset="0"/>
-                <a:ea typeface="Yu Gothic" pitchFamily="34" charset="-122"/>
-                <a:cs typeface="Yu Gothic" pitchFamily="34" charset="-120"/>
-              </a:rPr>
-              <a:t>新しい技術に出会ったとき、どの階層の、どの問題を、どういう迂回路で解いているのかを見抜けること</a:t>
-            </a:r>
-            <a:endParaRPr lang="en-US" sz="1700" dirty="0"/>
-          </a:p>
-        </p:txBody>
-      </p:sp>
-      <p:sp>
-        <p:nvSpPr>
-          <p:cNvPr id="8" name="Text 6"/>
-          <p:cNvSpPr/>
-          <p:nvPr/>
-        </p:nvSpPr>
-        <p:spPr>
-          <a:xfrm>
-            <a:off x="1188720" y="3090672"/>
-            <a:ext cx="4572000" cy="457200"/>
-          </a:xfrm>
-          <a:prstGeom prst="rect">
-            <a:avLst/>
-          </a:prstGeom>
-          <a:noFill/>
-          <a:ln/>
-        </p:spPr>
-        <p:txBody>
-          <a:bodyPr wrap="square" lIns="0" tIns="0" rIns="0" bIns="0" rtlCol="0" anchor="ctr"/>
-          <a:lstStyle/>
-          <a:p>
-            <a:pPr algn="r" indent="0" marL="0">
-              <a:buNone/>
-            </a:pPr>
-            <a:r>
-              <a:rPr lang="en-US" sz="1500" dirty="0">
-                <a:solidFill>
-                  <a:srgbClr val="16191D"/>
-                </a:solidFill>
-                <a:latin typeface="Yu Gothic" pitchFamily="34" charset="0"/>
-                <a:ea typeface="Yu Gothic" pitchFamily="34" charset="-122"/>
-                <a:cs typeface="Yu Gothic" pitchFamily="34" charset="-120"/>
-              </a:rPr>
-              <a:t>1936年のチューリングの定義</a:t>
-            </a:r>
-            <a:endParaRPr lang="en-US" sz="1500" dirty="0"/>
-          </a:p>
-        </p:txBody>
-      </p:sp>
-      <p:sp>
-        <p:nvSpPr>
-          <p:cNvPr id="9" name="Shape 7"/>
-          <p:cNvSpPr/>
-          <p:nvPr/>
-        </p:nvSpPr>
-        <p:spPr>
-          <a:xfrm>
-            <a:off x="5943600" y="3218688"/>
-            <a:ext cx="640080" cy="201168"/>
-          </a:xfrm>
-          <a:prstGeom prst="rightArrow">
-            <a:avLst/>
-          </a:prstGeom>
-          <a:solidFill>
-            <a:srgbClr val="0B5CAD"/>
-          </a:solidFill>
-          <a:ln/>
-        </p:spPr>
-      </p:sp>
-      <p:sp>
-        <p:nvSpPr>
-          <p:cNvPr id="10" name="Text 8"/>
-          <p:cNvSpPr/>
-          <p:nvPr/>
-        </p:nvSpPr>
-        <p:spPr>
-          <a:xfrm>
-            <a:off x="6766560" y="3090672"/>
-            <a:ext cx="4206240" cy="457200"/>
-          </a:xfrm>
-          <a:prstGeom prst="rect">
-            <a:avLst/>
-          </a:prstGeom>
-          <a:noFill/>
-          <a:ln/>
-        </p:spPr>
-        <p:txBody>
-          <a:bodyPr wrap="square" lIns="0" tIns="0" rIns="0" bIns="0" rtlCol="0" anchor="ctr"/>
-          <a:lstStyle/>
-          <a:p>
-            <a:pPr indent="0" marL="0">
-              <a:buNone/>
-            </a:pPr>
-            <a:r>
-              <a:rPr lang="en-US" sz="1600" b="1" dirty="0">
-                <a:solidFill>
-                  <a:srgbClr val="0B5CAD"/>
-                </a:solidFill>
-                <a:latin typeface="Yu Gothic" pitchFamily="34" charset="0"/>
-                <a:ea typeface="Yu Gothic" pitchFamily="34" charset="-122"/>
-                <a:cs typeface="Yu Gothic" pitchFamily="34" charset="-120"/>
-              </a:rPr>
-              <a:t>変わっていない</a:t>
-            </a:r>
-            <a:endParaRPr lang="en-US" sz="1600" dirty="0"/>
-          </a:p>
-        </p:txBody>
-      </p:sp>
-      <p:sp>
-        <p:nvSpPr>
-          <p:cNvPr id="11" name="Text 9"/>
-          <p:cNvSpPr/>
-          <p:nvPr/>
-        </p:nvSpPr>
-        <p:spPr>
-          <a:xfrm>
-            <a:off x="1188720" y="3712464"/>
-            <a:ext cx="4572000" cy="457200"/>
-          </a:xfrm>
-          <a:prstGeom prst="rect">
-            <a:avLst/>
-          </a:prstGeom>
-          <a:noFill/>
-          <a:ln/>
-        </p:spPr>
-        <p:txBody>
-          <a:bodyPr wrap="square" lIns="0" tIns="0" rIns="0" bIns="0" rtlCol="0" anchor="ctr"/>
-          <a:lstStyle/>
-          <a:p>
-            <a:pPr algn="r" indent="0" marL="0">
-              <a:buNone/>
-            </a:pPr>
-            <a:r>
-              <a:rPr lang="en-US" sz="1500" dirty="0">
-                <a:solidFill>
-                  <a:srgbClr val="16191D"/>
-                </a:solidFill>
-                <a:latin typeface="Yu Gothic" pitchFamily="34" charset="0"/>
-                <a:ea typeface="Yu Gothic" pitchFamily="34" charset="-122"/>
-                <a:cs typeface="Yu Gothic" pitchFamily="34" charset="-120"/>
-              </a:rPr>
-              <a:t>記憶階層の考え方</a:t>
-            </a:r>
-            <a:endParaRPr lang="en-US" sz="1500" dirty="0"/>
-          </a:p>
-        </p:txBody>
-      </p:sp>
-      <p:sp>
-        <p:nvSpPr>
-          <p:cNvPr id="12" name="Shape 10"/>
-          <p:cNvSpPr/>
-          <p:nvPr/>
-        </p:nvSpPr>
-        <p:spPr>
-          <a:xfrm>
-            <a:off x="5943600" y="3840480"/>
-            <a:ext cx="640080" cy="201168"/>
-          </a:xfrm>
-          <a:prstGeom prst="rightArrow">
-            <a:avLst/>
-          </a:prstGeom>
-          <a:solidFill>
-            <a:srgbClr val="0B5CAD"/>
-          </a:solidFill>
-          <a:ln/>
-        </p:spPr>
-      </p:sp>
-      <p:sp>
-        <p:nvSpPr>
-          <p:cNvPr id="13" name="Text 11"/>
-          <p:cNvSpPr/>
-          <p:nvPr/>
-        </p:nvSpPr>
-        <p:spPr>
-          <a:xfrm>
-            <a:off x="6766560" y="3712464"/>
-            <a:ext cx="4206240" cy="457200"/>
-          </a:xfrm>
-          <a:prstGeom prst="rect">
-            <a:avLst/>
-          </a:prstGeom>
-          <a:noFill/>
-          <a:ln/>
-        </p:spPr>
-        <p:txBody>
-          <a:bodyPr wrap="square" lIns="0" tIns="0" rIns="0" bIns="0" rtlCol="0" anchor="ctr"/>
-          <a:lstStyle/>
-          <a:p>
-            <a:pPr indent="0" marL="0">
-              <a:buNone/>
-            </a:pPr>
-            <a:r>
-              <a:rPr lang="en-US" sz="1600" b="1" dirty="0">
-                <a:solidFill>
-                  <a:srgbClr val="0B5CAD"/>
-                </a:solidFill>
-                <a:latin typeface="Yu Gothic" pitchFamily="34" charset="0"/>
-                <a:ea typeface="Yu Gothic" pitchFamily="34" charset="-122"/>
-                <a:cs typeface="Yu Gothic" pitchFamily="34" charset="-120"/>
-              </a:rPr>
-              <a:t>変わっていない</a:t>
-            </a:r>
-            <a:endParaRPr lang="en-US" sz="1600" dirty="0"/>
-          </a:p>
-        </p:txBody>
-      </p:sp>
-      <p:sp>
-        <p:nvSpPr>
-          <p:cNvPr id="14" name="Text 12"/>
-          <p:cNvSpPr/>
-          <p:nvPr/>
-        </p:nvSpPr>
-        <p:spPr>
-          <a:xfrm>
-            <a:off x="1188720" y="4334256"/>
-            <a:ext cx="4572000" cy="457200"/>
-          </a:xfrm>
-          <a:prstGeom prst="rect">
-            <a:avLst/>
-          </a:prstGeom>
-          <a:noFill/>
-          <a:ln/>
-        </p:spPr>
-        <p:txBody>
-          <a:bodyPr wrap="square" lIns="0" tIns="0" rIns="0" bIns="0" rtlCol="0" anchor="ctr"/>
-          <a:lstStyle/>
-          <a:p>
-            <a:pPr algn="r" indent="0" marL="0">
-              <a:buNone/>
-            </a:pPr>
-            <a:r>
-              <a:rPr lang="en-US" sz="1500" dirty="0">
-                <a:solidFill>
-                  <a:srgbClr val="16191D"/>
-                </a:solidFill>
-                <a:latin typeface="Yu Gothic" pitchFamily="34" charset="0"/>
-                <a:ea typeface="Yu Gothic" pitchFamily="34" charset="-122"/>
-                <a:cs typeface="Yu Gothic" pitchFamily="34" charset="-120"/>
-              </a:rPr>
-              <a:t>階層化の思想</a:t>
-            </a:r>
-            <a:endParaRPr lang="en-US" sz="1500" dirty="0"/>
-          </a:p>
-        </p:txBody>
-      </p:sp>
-      <p:sp>
-        <p:nvSpPr>
-          <p:cNvPr id="15" name="Shape 13"/>
-          <p:cNvSpPr/>
-          <p:nvPr/>
-        </p:nvSpPr>
-        <p:spPr>
-          <a:xfrm>
-            <a:off x="5943600" y="4462272"/>
-            <a:ext cx="640080" cy="201168"/>
-          </a:xfrm>
-          <a:prstGeom prst="rightArrow">
-            <a:avLst/>
-          </a:prstGeom>
-          <a:solidFill>
-            <a:srgbClr val="0B5CAD"/>
-          </a:solidFill>
-          <a:ln/>
-        </p:spPr>
-      </p:sp>
-      <p:sp>
-        <p:nvSpPr>
-          <p:cNvPr id="16" name="Text 14"/>
-          <p:cNvSpPr/>
-          <p:nvPr/>
-        </p:nvSpPr>
-        <p:spPr>
-          <a:xfrm>
-            <a:off x="6766560" y="4334256"/>
-            <a:ext cx="4206240" cy="457200"/>
-          </a:xfrm>
-          <a:prstGeom prst="rect">
-            <a:avLst/>
-          </a:prstGeom>
-          <a:noFill/>
-          <a:ln/>
-        </p:spPr>
-        <p:txBody>
-          <a:bodyPr wrap="square" lIns="0" tIns="0" rIns="0" bIns="0" rtlCol="0" anchor="ctr"/>
-          <a:lstStyle/>
-          <a:p>
-            <a:pPr indent="0" marL="0">
-              <a:buNone/>
-            </a:pPr>
-            <a:r>
-              <a:rPr lang="en-US" sz="1600" b="1" dirty="0">
-                <a:solidFill>
-                  <a:srgbClr val="0B5CAD"/>
-                </a:solidFill>
-                <a:latin typeface="Yu Gothic" pitchFamily="34" charset="0"/>
-                <a:ea typeface="Yu Gothic" pitchFamily="34" charset="-122"/>
-                <a:cs typeface="Yu Gothic" pitchFamily="34" charset="-120"/>
-              </a:rPr>
-              <a:t>変わっていない</a:t>
-            </a:r>
-            <a:endParaRPr lang="en-US" sz="1600" dirty="0"/>
-          </a:p>
-        </p:txBody>
-      </p:sp>
-      <p:sp>
-        <p:nvSpPr>
-          <p:cNvPr id="17" name="Text 15"/>
-          <p:cNvSpPr/>
-          <p:nvPr/>
-        </p:nvSpPr>
-        <p:spPr>
-          <a:xfrm>
-            <a:off x="1188720" y="4956048"/>
-            <a:ext cx="4572000" cy="457200"/>
-          </a:xfrm>
-          <a:prstGeom prst="rect">
-            <a:avLst/>
-          </a:prstGeom>
-          <a:noFill/>
-          <a:ln/>
-        </p:spPr>
-        <p:txBody>
-          <a:bodyPr wrap="square" lIns="0" tIns="0" rIns="0" bIns="0" rtlCol="0" anchor="ctr"/>
-          <a:lstStyle/>
-          <a:p>
-            <a:pPr algn="r" indent="0" marL="0">
-              <a:buNone/>
-            </a:pPr>
-            <a:r>
-              <a:rPr lang="en-US" sz="1500" dirty="0">
-                <a:solidFill>
-                  <a:srgbClr val="16191D"/>
-                </a:solidFill>
-                <a:latin typeface="Yu Gothic" pitchFamily="34" charset="0"/>
-                <a:ea typeface="Yu Gothic" pitchFamily="34" charset="-122"/>
-                <a:cs typeface="Yu Gothic" pitchFamily="34" charset="-120"/>
-              </a:rPr>
-              <a:t>限界を知って迂回する姿勢</a:t>
-            </a:r>
-            <a:endParaRPr lang="en-US" sz="1500" dirty="0"/>
-          </a:p>
-        </p:txBody>
-      </p:sp>
-      <p:sp>
-        <p:nvSpPr>
-          <p:cNvPr id="18" name="Shape 16"/>
-          <p:cNvSpPr/>
-          <p:nvPr/>
-        </p:nvSpPr>
-        <p:spPr>
-          <a:xfrm>
-            <a:off x="5943600" y="5084064"/>
-            <a:ext cx="640080" cy="201168"/>
-          </a:xfrm>
-          <a:prstGeom prst="rightArrow">
-            <a:avLst/>
-          </a:prstGeom>
-          <a:solidFill>
-            <a:srgbClr val="0B5CAD"/>
-          </a:solidFill>
-          <a:ln/>
-        </p:spPr>
-      </p:sp>
-      <p:sp>
-        <p:nvSpPr>
-          <p:cNvPr id="19" name="Text 17"/>
-          <p:cNvSpPr/>
-          <p:nvPr/>
-        </p:nvSpPr>
-        <p:spPr>
-          <a:xfrm>
-            <a:off x="6766560" y="4956048"/>
-            <a:ext cx="4206240" cy="457200"/>
-          </a:xfrm>
-          <a:prstGeom prst="rect">
-            <a:avLst/>
-          </a:prstGeom>
-          <a:noFill/>
-          <a:ln/>
-        </p:spPr>
-        <p:txBody>
-          <a:bodyPr wrap="square" lIns="0" tIns="0" rIns="0" bIns="0" rtlCol="0" anchor="ctr"/>
-          <a:lstStyle/>
-          <a:p>
-            <a:pPr indent="0" marL="0">
-              <a:buNone/>
-            </a:pPr>
-            <a:r>
-              <a:rPr lang="en-US" sz="1600" b="1" dirty="0">
-                <a:solidFill>
-                  <a:srgbClr val="0B5CAD"/>
-                </a:solidFill>
-                <a:latin typeface="Yu Gothic" pitchFamily="34" charset="0"/>
-                <a:ea typeface="Yu Gothic" pitchFamily="34" charset="-122"/>
-                <a:cs typeface="Yu Gothic" pitchFamily="34" charset="-120"/>
-              </a:rPr>
-              <a:t>変わっていない</a:t>
-            </a:r>
-            <a:endParaRPr lang="en-US" sz="1600" dirty="0"/>
-          </a:p>
-        </p:txBody>
-      </p:sp>
-      <p:sp>
-        <p:nvSpPr>
-          <p:cNvPr id="20" name="Text 18"/>
-          <p:cNvSpPr/>
-          <p:nvPr/>
-        </p:nvSpPr>
-        <p:spPr>
-          <a:xfrm>
-            <a:off x="685800" y="5669280"/>
-            <a:ext cx="10789920" cy="457200"/>
-          </a:xfrm>
-          <a:prstGeom prst="rect">
-            <a:avLst/>
-          </a:prstGeom>
-          <a:noFill/>
-          <a:ln/>
-        </p:spPr>
-        <p:txBody>
-          <a:bodyPr wrap="square" lIns="0" tIns="0" rIns="0" bIns="0" rtlCol="0" anchor="ctr"/>
+            <a:off x="868680" y="1965960"/>
+            <a:ext cx="3078480" cy="731520"/>
+          </a:xfrm>
+          <a:prstGeom prst="rect">
+            <a:avLst/>
+          </a:prstGeom>
+          <a:noFill/>
+          <a:ln/>
+        </p:spPr>
+        <p:txBody>
+          <a:bodyPr wrap="square" lIns="0" tIns="0" rIns="0" bIns="0" rtlCol="0" anchor="t"/>
           <a:lstStyle/>
           <a:p>
             <a:pPr indent="0" marL="0">
               <a:lnSpc>
-                <a:spcPts val="2000"/>
+                <a:spcPts val="1600"/>
               </a:lnSpc>
               <a:buNone/>
             </a:pPr>
             <a:r>
-              <a:rPr lang="en-US" sz="1300" dirty="0">
+              <a:rPr lang="en-US" sz="1200" dirty="0">
                 <a:solidFill>
                   <a:srgbClr val="5F6672"/>
                 </a:solidFill>
@@ -17466,7 +16824,589 @@
                 <a:ea typeface="Yu Gothic" pitchFamily="34" charset="-122"/>
                 <a:cs typeface="Yu Gothic" pitchFamily="34" charset="-120"/>
               </a:rPr>
-              <a:t>それが、この13回で身につけてほしいことである。</a:t>
+              <a:t>ゲート→CPU、機械語→高級言語、物理層→アプリ層。各層は下の詳細を知らずに仕事ができる</a:t>
+            </a:r>
+            <a:endParaRPr lang="en-US" sz="1200" dirty="0"/>
+          </a:p>
+        </p:txBody>
+      </p:sp>
+      <p:sp>
+        <p:nvSpPr>
+          <p:cNvPr id="8" name="Shape 6"/>
+          <p:cNvSpPr/>
+          <p:nvPr/>
+        </p:nvSpPr>
+        <p:spPr>
+          <a:xfrm>
+            <a:off x="4358640" y="1481328"/>
+            <a:ext cx="3444240" cy="1371600"/>
+          </a:xfrm>
+          <a:prstGeom prst="roundRect">
+            <a:avLst>
+              <a:gd name="adj" fmla="val 4000"/>
+            </a:avLst>
+          </a:prstGeom>
+          <a:solidFill>
+            <a:srgbClr val="EEF1F5"/>
+          </a:solidFill>
+          <a:ln w="12700">
+            <a:solidFill>
+              <a:srgbClr val="DDE4EC"/>
+            </a:solidFill>
+            <a:prstDash val="solid"/>
+          </a:ln>
+        </p:spPr>
+      </p:sp>
+      <p:sp>
+        <p:nvSpPr>
+          <p:cNvPr id="9" name="Text 7"/>
+          <p:cNvSpPr/>
+          <p:nvPr/>
+        </p:nvSpPr>
+        <p:spPr>
+          <a:xfrm>
+            <a:off x="4541520" y="1618488"/>
+            <a:ext cx="3078480" cy="310896"/>
+          </a:xfrm>
+          <a:prstGeom prst="rect">
+            <a:avLst/>
+          </a:prstGeom>
+          <a:noFill/>
+          <a:ln/>
+        </p:spPr>
+        <p:txBody>
+          <a:bodyPr wrap="square" lIns="0" tIns="0" rIns="0" bIns="0" rtlCol="0" anchor="ctr"/>
+          <a:lstStyle/>
+          <a:p>
+            <a:pPr indent="0" marL="0">
+              <a:buNone/>
+            </a:pPr>
+            <a:r>
+              <a:rPr lang="en-US" sz="1400" b="1" dirty="0">
+                <a:solidFill>
+                  <a:srgbClr val="16191D"/>
+                </a:solidFill>
+                <a:latin typeface="Yu Gothic" pitchFamily="34" charset="0"/>
+                <a:ea typeface="Yu Gothic" pitchFamily="34" charset="-122"/>
+                <a:cs typeface="Yu Gothic" pitchFamily="34" charset="-120"/>
+              </a:rPr>
+              <a:t>対応表を挟んで幻を見せる</a:t>
+            </a:r>
+            <a:endParaRPr lang="en-US" sz="1400" dirty="0"/>
+          </a:p>
+        </p:txBody>
+      </p:sp>
+      <p:sp>
+        <p:nvSpPr>
+          <p:cNvPr id="10" name="Text 8"/>
+          <p:cNvSpPr/>
+          <p:nvPr/>
+        </p:nvSpPr>
+        <p:spPr>
+          <a:xfrm>
+            <a:off x="4541520" y="1965960"/>
+            <a:ext cx="3078480" cy="731520"/>
+          </a:xfrm>
+          <a:prstGeom prst="rect">
+            <a:avLst/>
+          </a:prstGeom>
+          <a:noFill/>
+          <a:ln/>
+        </p:spPr>
+        <p:txBody>
+          <a:bodyPr wrap="square" lIns="0" tIns="0" rIns="0" bIns="0" rtlCol="0" anchor="t"/>
+          <a:lstStyle/>
+          <a:p>
+            <a:pPr indent="0" marL="0">
+              <a:lnSpc>
+                <a:spcPts val="1600"/>
+              </a:lnSpc>
+              <a:buNone/>
+            </a:pPr>
+            <a:r>
+              <a:rPr lang="en-US" sz="1200" dirty="0">
+                <a:solidFill>
+                  <a:srgbClr val="5F6672"/>
+                </a:solidFill>
+                <a:latin typeface="Yu Gothic" pitchFamily="34" charset="0"/>
+                <a:ea typeface="Yu Gothic" pitchFamily="34" charset="-122"/>
+                <a:cs typeface="Yu Gothic" pitchFamily="34" charset="-120"/>
+              </a:rPr>
+              <a:t>仮想記憶、SSD の変換、ファイルシステム、DNS、NAT、仮想化</a:t>
+            </a:r>
+            <a:endParaRPr lang="en-US" sz="1200" dirty="0"/>
+          </a:p>
+        </p:txBody>
+      </p:sp>
+      <p:sp>
+        <p:nvSpPr>
+          <p:cNvPr id="11" name="Shape 9"/>
+          <p:cNvSpPr/>
+          <p:nvPr/>
+        </p:nvSpPr>
+        <p:spPr>
+          <a:xfrm>
+            <a:off x="8031480" y="1481328"/>
+            <a:ext cx="3444240" cy="1371600"/>
+          </a:xfrm>
+          <a:prstGeom prst="roundRect">
+            <a:avLst>
+              <a:gd name="adj" fmla="val 4000"/>
+            </a:avLst>
+          </a:prstGeom>
+          <a:solidFill>
+            <a:srgbClr val="EEF1F5"/>
+          </a:solidFill>
+          <a:ln w="12700">
+            <a:solidFill>
+              <a:srgbClr val="DDE4EC"/>
+            </a:solidFill>
+            <a:prstDash val="solid"/>
+          </a:ln>
+        </p:spPr>
+      </p:sp>
+      <p:sp>
+        <p:nvSpPr>
+          <p:cNvPr id="12" name="Text 10"/>
+          <p:cNvSpPr/>
+          <p:nvPr/>
+        </p:nvSpPr>
+        <p:spPr>
+          <a:xfrm>
+            <a:off x="8214360" y="1618488"/>
+            <a:ext cx="3078480" cy="310896"/>
+          </a:xfrm>
+          <a:prstGeom prst="rect">
+            <a:avLst/>
+          </a:prstGeom>
+          <a:noFill/>
+          <a:ln/>
+        </p:spPr>
+        <p:txBody>
+          <a:bodyPr wrap="square" lIns="0" tIns="0" rIns="0" bIns="0" rtlCol="0" anchor="ctr"/>
+          <a:lstStyle/>
+          <a:p>
+            <a:pPr indent="0" marL="0">
+              <a:buNone/>
+            </a:pPr>
+            <a:r>
+              <a:rPr lang="en-US" sz="1400" b="1" dirty="0">
+                <a:solidFill>
+                  <a:srgbClr val="16191D"/>
+                </a:solidFill>
+                <a:latin typeface="Yu Gothic" pitchFamily="34" charset="0"/>
+                <a:ea typeface="Yu Gothic" pitchFamily="34" charset="-122"/>
+                <a:cs typeface="Yu Gothic" pitchFamily="34" charset="-120"/>
+              </a:rPr>
+              <a:t>局所性とキャッシュ</a:t>
+            </a:r>
+            <a:endParaRPr lang="en-US" sz="1400" dirty="0"/>
+          </a:p>
+        </p:txBody>
+      </p:sp>
+      <p:sp>
+        <p:nvSpPr>
+          <p:cNvPr id="13" name="Text 11"/>
+          <p:cNvSpPr/>
+          <p:nvPr/>
+        </p:nvSpPr>
+        <p:spPr>
+          <a:xfrm>
+            <a:off x="8214360" y="1965960"/>
+            <a:ext cx="3078480" cy="731520"/>
+          </a:xfrm>
+          <a:prstGeom prst="rect">
+            <a:avLst/>
+          </a:prstGeom>
+          <a:noFill/>
+          <a:ln/>
+        </p:spPr>
+        <p:txBody>
+          <a:bodyPr wrap="square" lIns="0" tIns="0" rIns="0" bIns="0" rtlCol="0" anchor="t"/>
+          <a:lstStyle/>
+          <a:p>
+            <a:pPr indent="0" marL="0">
+              <a:lnSpc>
+                <a:spcPts val="1600"/>
+              </a:lnSpc>
+              <a:buNone/>
+            </a:pPr>
+            <a:r>
+              <a:rPr lang="en-US" sz="1200" dirty="0">
+                <a:solidFill>
+                  <a:srgbClr val="5F6672"/>
+                </a:solidFill>
+                <a:latin typeface="Yu Gothic" pitchFamily="34" charset="0"/>
+                <a:ea typeface="Yu Gothic" pitchFamily="34" charset="-122"/>
+                <a:cs typeface="Yu Gothic" pitchFamily="34" charset="-120"/>
+              </a:rPr>
+              <a:t>CPU キャッシュ、ページング、DNS、CDN、DB のバッファ。あらゆる規模で同じ解法</a:t>
+            </a:r>
+            <a:endParaRPr lang="en-US" sz="1200" dirty="0"/>
+          </a:p>
+        </p:txBody>
+      </p:sp>
+      <p:sp>
+        <p:nvSpPr>
+          <p:cNvPr id="14" name="Shape 12"/>
+          <p:cNvSpPr/>
+          <p:nvPr/>
+        </p:nvSpPr>
+        <p:spPr>
+          <a:xfrm>
+            <a:off x="685800" y="3054096"/>
+            <a:ext cx="3444240" cy="1371600"/>
+          </a:xfrm>
+          <a:prstGeom prst="roundRect">
+            <a:avLst>
+              <a:gd name="adj" fmla="val 4000"/>
+            </a:avLst>
+          </a:prstGeom>
+          <a:solidFill>
+            <a:srgbClr val="EEF1F5"/>
+          </a:solidFill>
+          <a:ln w="12700">
+            <a:solidFill>
+              <a:srgbClr val="DDE4EC"/>
+            </a:solidFill>
+            <a:prstDash val="solid"/>
+          </a:ln>
+        </p:spPr>
+      </p:sp>
+      <p:sp>
+        <p:nvSpPr>
+          <p:cNvPr id="15" name="Text 13"/>
+          <p:cNvSpPr/>
+          <p:nvPr/>
+        </p:nvSpPr>
+        <p:spPr>
+          <a:xfrm>
+            <a:off x="868680" y="3191256"/>
+            <a:ext cx="3078480" cy="310896"/>
+          </a:xfrm>
+          <a:prstGeom prst="rect">
+            <a:avLst/>
+          </a:prstGeom>
+          <a:noFill/>
+          <a:ln/>
+        </p:spPr>
+        <p:txBody>
+          <a:bodyPr wrap="square" lIns="0" tIns="0" rIns="0" bIns="0" rtlCol="0" anchor="ctr"/>
+          <a:lstStyle/>
+          <a:p>
+            <a:pPr indent="0" marL="0">
+              <a:buNone/>
+            </a:pPr>
+            <a:r>
+              <a:rPr lang="en-US" sz="1400" b="1" dirty="0">
+                <a:solidFill>
+                  <a:srgbClr val="16191D"/>
+                </a:solidFill>
+                <a:latin typeface="Yu Gothic" pitchFamily="34" charset="0"/>
+                <a:ea typeface="Yu Gothic" pitchFamily="34" charset="-122"/>
+                <a:cs typeface="Yu Gothic" pitchFamily="34" charset="-120"/>
+              </a:rPr>
+              <a:t>端点に賢さを置く</a:t>
+            </a:r>
+            <a:endParaRPr lang="en-US" sz="1400" dirty="0"/>
+          </a:p>
+        </p:txBody>
+      </p:sp>
+      <p:sp>
+        <p:nvSpPr>
+          <p:cNvPr id="16" name="Text 14"/>
+          <p:cNvSpPr/>
+          <p:nvPr/>
+        </p:nvSpPr>
+        <p:spPr>
+          <a:xfrm>
+            <a:off x="868680" y="3538728"/>
+            <a:ext cx="3078480" cy="731520"/>
+          </a:xfrm>
+          <a:prstGeom prst="rect">
+            <a:avLst/>
+          </a:prstGeom>
+          <a:noFill/>
+          <a:ln/>
+        </p:spPr>
+        <p:txBody>
+          <a:bodyPr wrap="square" lIns="0" tIns="0" rIns="0" bIns="0" rtlCol="0" anchor="t"/>
+          <a:lstStyle/>
+          <a:p>
+            <a:pPr indent="0" marL="0">
+              <a:lnSpc>
+                <a:spcPts val="1600"/>
+              </a:lnSpc>
+              <a:buNone/>
+            </a:pPr>
+            <a:r>
+              <a:rPr lang="en-US" sz="1200" dirty="0">
+                <a:solidFill>
+                  <a:srgbClr val="5F6672"/>
+                </a:solidFill>
+                <a:latin typeface="Yu Gothic" pitchFamily="34" charset="0"/>
+                <a:ea typeface="Yu Gothic" pitchFamily="34" charset="-122"/>
+                <a:cs typeface="Yu Gothic" pitchFamily="34" charset="-120"/>
+              </a:rPr>
+              <a:t>TCP の信頼性と輻輳制御。網は単純に、賢さは端に</a:t>
+            </a:r>
+            <a:endParaRPr lang="en-US" sz="1200" dirty="0"/>
+          </a:p>
+        </p:txBody>
+      </p:sp>
+      <p:sp>
+        <p:nvSpPr>
+          <p:cNvPr id="17" name="Shape 15"/>
+          <p:cNvSpPr/>
+          <p:nvPr/>
+        </p:nvSpPr>
+        <p:spPr>
+          <a:xfrm>
+            <a:off x="4358640" y="3054096"/>
+            <a:ext cx="3444240" cy="1371600"/>
+          </a:xfrm>
+          <a:prstGeom prst="roundRect">
+            <a:avLst>
+              <a:gd name="adj" fmla="val 4000"/>
+            </a:avLst>
+          </a:prstGeom>
+          <a:solidFill>
+            <a:srgbClr val="EEF1F5"/>
+          </a:solidFill>
+          <a:ln w="12700">
+            <a:solidFill>
+              <a:srgbClr val="DDE4EC"/>
+            </a:solidFill>
+            <a:prstDash val="solid"/>
+          </a:ln>
+        </p:spPr>
+      </p:sp>
+      <p:sp>
+        <p:nvSpPr>
+          <p:cNvPr id="18" name="Text 16"/>
+          <p:cNvSpPr/>
+          <p:nvPr/>
+        </p:nvSpPr>
+        <p:spPr>
+          <a:xfrm>
+            <a:off x="4541520" y="3191256"/>
+            <a:ext cx="3078480" cy="310896"/>
+          </a:xfrm>
+          <a:prstGeom prst="rect">
+            <a:avLst/>
+          </a:prstGeom>
+          <a:noFill/>
+          <a:ln/>
+        </p:spPr>
+        <p:txBody>
+          <a:bodyPr wrap="square" lIns="0" tIns="0" rIns="0" bIns="0" rtlCol="0" anchor="ctr"/>
+          <a:lstStyle/>
+          <a:p>
+            <a:pPr indent="0" marL="0">
+              <a:buNone/>
+            </a:pPr>
+            <a:r>
+              <a:rPr lang="en-US" sz="1400" b="1" dirty="0">
+                <a:solidFill>
+                  <a:srgbClr val="16191D"/>
+                </a:solidFill>
+                <a:latin typeface="Yu Gothic" pitchFamily="34" charset="0"/>
+                <a:ea typeface="Yu Gothic" pitchFamily="34" charset="-122"/>
+                <a:cs typeface="Yu Gothic" pitchFamily="34" charset="-120"/>
+              </a:rPr>
+              <a:t>データとコードの境界</a:t>
+            </a:r>
+            <a:endParaRPr lang="en-US" sz="1400" dirty="0"/>
+          </a:p>
+        </p:txBody>
+      </p:sp>
+      <p:sp>
+        <p:nvSpPr>
+          <p:cNvPr id="19" name="Text 17"/>
+          <p:cNvSpPr/>
+          <p:nvPr/>
+        </p:nvSpPr>
+        <p:spPr>
+          <a:xfrm>
+            <a:off x="4541520" y="3538728"/>
+            <a:ext cx="3078480" cy="731520"/>
+          </a:xfrm>
+          <a:prstGeom prst="rect">
+            <a:avLst/>
+          </a:prstGeom>
+          <a:noFill/>
+          <a:ln/>
+        </p:spPr>
+        <p:txBody>
+          <a:bodyPr wrap="square" lIns="0" tIns="0" rIns="0" bIns="0" rtlCol="0" anchor="t"/>
+          <a:lstStyle/>
+          <a:p>
+            <a:pPr indent="0" marL="0">
+              <a:lnSpc>
+                <a:spcPts val="1600"/>
+              </a:lnSpc>
+              <a:buNone/>
+            </a:pPr>
+            <a:r>
+              <a:rPr lang="en-US" sz="1200" dirty="0">
+                <a:solidFill>
+                  <a:srgbClr val="5F6672"/>
+                </a:solidFill>
+                <a:latin typeface="Yu Gothic" pitchFamily="34" charset="0"/>
+                <a:ea typeface="Yu Gothic" pitchFamily="34" charset="-122"/>
+                <a:cs typeface="Yu Gothic" pitchFamily="34" charset="-120"/>
+              </a:rPr>
+              <a:t>ノイマン型の力と危うさ。SQLi、XSS、そしてプロンプトインジェクション</a:t>
+            </a:r>
+            <a:endParaRPr lang="en-US" sz="1200" dirty="0"/>
+          </a:p>
+        </p:txBody>
+      </p:sp>
+      <p:sp>
+        <p:nvSpPr>
+          <p:cNvPr id="20" name="Shape 18"/>
+          <p:cNvSpPr/>
+          <p:nvPr/>
+        </p:nvSpPr>
+        <p:spPr>
+          <a:xfrm>
+            <a:off x="8031480" y="3054096"/>
+            <a:ext cx="3444240" cy="1371600"/>
+          </a:xfrm>
+          <a:prstGeom prst="roundRect">
+            <a:avLst>
+              <a:gd name="adj" fmla="val 4000"/>
+            </a:avLst>
+          </a:prstGeom>
+          <a:solidFill>
+            <a:srgbClr val="EEF1F5"/>
+          </a:solidFill>
+          <a:ln w="12700">
+            <a:solidFill>
+              <a:srgbClr val="DDE4EC"/>
+            </a:solidFill>
+            <a:prstDash val="solid"/>
+          </a:ln>
+        </p:spPr>
+      </p:sp>
+      <p:sp>
+        <p:nvSpPr>
+          <p:cNvPr id="21" name="Text 19"/>
+          <p:cNvSpPr/>
+          <p:nvPr/>
+        </p:nvSpPr>
+        <p:spPr>
+          <a:xfrm>
+            <a:off x="8214360" y="3191256"/>
+            <a:ext cx="3078480" cy="310896"/>
+          </a:xfrm>
+          <a:prstGeom prst="rect">
+            <a:avLst/>
+          </a:prstGeom>
+          <a:noFill/>
+          <a:ln/>
+        </p:spPr>
+        <p:txBody>
+          <a:bodyPr wrap="square" lIns="0" tIns="0" rIns="0" bIns="0" rtlCol="0" anchor="ctr"/>
+          <a:lstStyle/>
+          <a:p>
+            <a:pPr indent="0" marL="0">
+              <a:buNone/>
+            </a:pPr>
+            <a:r>
+              <a:rPr lang="en-US" sz="1400" b="1" dirty="0">
+                <a:solidFill>
+                  <a:srgbClr val="16191D"/>
+                </a:solidFill>
+                <a:latin typeface="Yu Gothic" pitchFamily="34" charset="0"/>
+                <a:ea typeface="Yu Gothic" pitchFamily="34" charset="-122"/>
+                <a:cs typeface="Yu Gothic" pitchFamily="34" charset="-120"/>
+              </a:rPr>
+              <a:t>限界を知って迂回する</a:t>
+            </a:r>
+            <a:endParaRPr lang="en-US" sz="1400" dirty="0"/>
+          </a:p>
+        </p:txBody>
+      </p:sp>
+      <p:sp>
+        <p:nvSpPr>
+          <p:cNvPr id="22" name="Text 20"/>
+          <p:cNvSpPr/>
+          <p:nvPr/>
+        </p:nvSpPr>
+        <p:spPr>
+          <a:xfrm>
+            <a:off x="8214360" y="3538728"/>
+            <a:ext cx="3078480" cy="731520"/>
+          </a:xfrm>
+          <a:prstGeom prst="rect">
+            <a:avLst/>
+          </a:prstGeom>
+          <a:noFill/>
+          <a:ln/>
+        </p:spPr>
+        <p:txBody>
+          <a:bodyPr wrap="square" lIns="0" tIns="0" rIns="0" bIns="0" rtlCol="0" anchor="t"/>
+          <a:lstStyle/>
+          <a:p>
+            <a:pPr indent="0" marL="0">
+              <a:lnSpc>
+                <a:spcPts val="1600"/>
+              </a:lnSpc>
+              <a:buNone/>
+            </a:pPr>
+            <a:r>
+              <a:rPr lang="en-US" sz="1200" dirty="0">
+                <a:solidFill>
+                  <a:srgbClr val="5F6672"/>
+                </a:solidFill>
+                <a:latin typeface="Yu Gothic" pitchFamily="34" charset="0"/>
+                <a:ea typeface="Yu Gothic" pitchFamily="34" charset="-122"/>
+                <a:cs typeface="Yu Gothic" pitchFamily="34" charset="-120"/>
+              </a:rPr>
+              <a:t>停止問題、NP完全、アムダールの法則、CAP 定理</a:t>
+            </a:r>
+            <a:endParaRPr lang="en-US" sz="1200" dirty="0"/>
+          </a:p>
+        </p:txBody>
+      </p:sp>
+      <p:sp>
+        <p:nvSpPr>
+          <p:cNvPr id="23" name="Text 21"/>
+          <p:cNvSpPr/>
+          <p:nvPr/>
+        </p:nvSpPr>
+        <p:spPr>
+          <a:xfrm>
+            <a:off x="685800" y="5212080"/>
+            <a:ext cx="10789920" cy="512064"/>
+          </a:xfrm>
+          <a:prstGeom prst="rect">
+            <a:avLst/>
+          </a:prstGeom>
+          <a:noFill/>
+          <a:ln/>
+        </p:spPr>
+        <p:txBody>
+          <a:bodyPr wrap="square" lIns="0" tIns="0" rIns="0" bIns="0" rtlCol="0" anchor="ctr"/>
+          <a:lstStyle/>
+          <a:p>
+            <a:pPr indent="0" marL="0">
+              <a:lnSpc>
+                <a:spcPts val="1900"/>
+              </a:lnSpc>
+              <a:buNone/>
+            </a:pPr>
+            <a:r>
+              <a:rPr lang="en-US" sz="1300" b="1" dirty="0">
+                <a:solidFill>
+                  <a:srgbClr val="0B5CAD"/>
+                </a:solidFill>
+                <a:latin typeface="Yu Gothic" pitchFamily="34" charset="0"/>
+                <a:ea typeface="Yu Gothic" pitchFamily="34" charset="-122"/>
+                <a:cs typeface="Yu Gothic" pitchFamily="34" charset="-120"/>
+              </a:rPr>
+              <a:t>原理的な限界を知ることは、諦めることではない。正しい迂回路を選ぶために知る。</a:t>
             </a:r>
             <a:endParaRPr lang="en-US" sz="1300" dirty="0"/>
           </a:p>
@@ -17537,7 +17477,7 @@
                 <a:ea typeface="Yu Gothic" pitchFamily="34" charset="-122"/>
                 <a:cs typeface="Yu Gothic" pitchFamily="34" charset="-120"/>
               </a:rPr>
-              <a:t>第13回</a:t>
+              <a:t>13.5　まとめ</a:t>
             </a:r>
             <a:endParaRPr lang="en-US" sz="1200" dirty="0"/>
           </a:p>
@@ -17576,7 +17516,7 @@
                 <a:ea typeface="Yu Gothic" pitchFamily="34" charset="-122"/>
                 <a:cs typeface="Yu Gothic" pitchFamily="34" charset="-120"/>
               </a:rPr>
-              <a:t>演習</a:t>
+              <a:t>最後に</a:t>
             </a:r>
             <a:endParaRPr lang="en-US" sz="3000" dirty="0"/>
           </a:p>
@@ -17623,24 +17563,66 @@
       </p:sp>
       <p:sp>
         <p:nvSpPr>
-          <p:cNvPr id="5" name="Shape 3"/>
-          <p:cNvSpPr/>
-          <p:nvPr/>
-        </p:nvSpPr>
-        <p:spPr>
-          <a:xfrm>
-            <a:off x="685800" y="1691640"/>
-            <a:ext cx="868680" cy="402336"/>
+          <p:cNvPr id="5" name="Text 3"/>
+          <p:cNvSpPr/>
+          <p:nvPr/>
+        </p:nvSpPr>
+        <p:spPr>
+          <a:xfrm>
+            <a:off x="685800" y="1481328"/>
+            <a:ext cx="10789920" cy="566928"/>
+          </a:xfrm>
+          <a:prstGeom prst="rect">
+            <a:avLst/>
+          </a:prstGeom>
+          <a:noFill/>
+          <a:ln/>
+        </p:spPr>
+        <p:txBody>
+          <a:bodyPr wrap="square" lIns="0" tIns="0" rIns="0" bIns="0" rtlCol="0" anchor="ctr"/>
+          <a:lstStyle/>
+          <a:p>
+            <a:pPr indent="0" marL="0">
+              <a:lnSpc>
+                <a:spcPts val="2200"/>
+              </a:lnSpc>
+              <a:buNone/>
+            </a:pPr>
+            <a:r>
+              <a:rPr lang="en-US" sz="1500" dirty="0">
+                <a:solidFill>
+                  <a:srgbClr val="16191D"/>
+                </a:solidFill>
+                <a:latin typeface="Yu Gothic" pitchFamily="34" charset="0"/>
+                <a:ea typeface="Yu Gothic" pitchFamily="34" charset="-122"/>
+                <a:cs typeface="Yu Gothic" pitchFamily="34" charset="-120"/>
+              </a:rPr>
+              <a:t>第1回で述べたとおり、この講義は機器のカタログを読むための科目ではない。CPU の型番も通信規格の数字も、数年で入れ替わる。</a:t>
+            </a:r>
+            <a:endParaRPr lang="en-US" sz="1500" dirty="0"/>
+          </a:p>
+        </p:txBody>
+      </p:sp>
+      <p:sp>
+        <p:nvSpPr>
+          <p:cNvPr id="6" name="Shape 4"/>
+          <p:cNvSpPr/>
+          <p:nvPr/>
+        </p:nvSpPr>
+        <p:spPr>
+          <a:xfrm>
+            <a:off x="685800" y="2130552"/>
+            <a:ext cx="10789920" cy="713232"/>
           </a:xfrm>
           <a:prstGeom prst="roundRect">
             <a:avLst>
-              <a:gd name="adj" fmla="val 18182"/>
+              <a:gd name="adj" fmla="val 7692"/>
             </a:avLst>
           </a:prstGeom>
           <a:solidFill>
             <a:srgbClr val="D9E6F4"/>
           </a:solidFill>
-          <a:ln w="12700">
+          <a:ln w="19050">
             <a:solidFill>
               <a:srgbClr val="0B5CAD"/>
             </a:solidFill>
@@ -17650,14 +17632,14 @@
       </p:sp>
       <p:sp>
         <p:nvSpPr>
-          <p:cNvPr id="6" name="Text 4"/>
-          <p:cNvSpPr/>
-          <p:nvPr/>
-        </p:nvSpPr>
-        <p:spPr>
-          <a:xfrm>
-            <a:off x="685800" y="1691640"/>
-            <a:ext cx="868680" cy="402336"/>
+          <p:cNvPr id="7" name="Text 5"/>
+          <p:cNvSpPr/>
+          <p:nvPr/>
+        </p:nvSpPr>
+        <p:spPr>
+          <a:xfrm>
+            <a:off x="914400" y="2286000"/>
+            <a:ext cx="10332720" cy="402336"/>
           </a:xfrm>
           <a:prstGeom prst="rect">
             <a:avLst/>
@@ -17669,495 +17651,455 @@
           <a:bodyPr wrap="square" lIns="0" tIns="0" rIns="0" bIns="0" rtlCol="0" anchor="ctr"/>
           <a:lstStyle/>
           <a:p>
-            <a:pPr algn="ctr" indent="0" marL="0">
-              <a:buNone/>
-            </a:pPr>
-            <a:r>
-              <a:rPr lang="en-US" sz="1300" b="1" dirty="0">
+            <a:pPr indent="0" marL="0">
+              <a:buNone/>
+            </a:pPr>
+            <a:r>
+              <a:rPr lang="en-US" sz="1700" b="1" dirty="0">
                 <a:solidFill>
                   <a:srgbClr val="0B5CAD"/>
                 </a:solidFill>
-                <a:latin typeface="Courier New" pitchFamily="34" charset="0"/>
-                <a:ea typeface="Courier New" pitchFamily="34" charset="-122"/>
-                <a:cs typeface="Courier New" pitchFamily="34" charset="-120"/>
-              </a:rPr>
-              <a:t>13-1</a:t>
-            </a:r>
-            <a:endParaRPr lang="en-US" sz="1300" dirty="0"/>
-          </a:p>
-        </p:txBody>
-      </p:sp>
-      <p:sp>
-        <p:nvSpPr>
-          <p:cNvPr id="7" name="Text 5"/>
-          <p:cNvSpPr/>
-          <p:nvPr/>
-        </p:nvSpPr>
-        <p:spPr>
-          <a:xfrm>
-            <a:off x="1783080" y="1673352"/>
-            <a:ext cx="9692640" cy="722376"/>
-          </a:xfrm>
-          <a:prstGeom prst="rect">
-            <a:avLst/>
-          </a:prstGeom>
-          <a:noFill/>
-          <a:ln/>
-        </p:spPr>
-        <p:txBody>
-          <a:bodyPr wrap="square" lIns="0" tIns="0" rIns="0" bIns="0" rtlCol="0" anchor="t"/>
+                <a:latin typeface="Yu Gothic" pitchFamily="34" charset="0"/>
+                <a:ea typeface="Yu Gothic" pitchFamily="34" charset="-122"/>
+                <a:cs typeface="Yu Gothic" pitchFamily="34" charset="-120"/>
+              </a:rPr>
+              <a:t>新しい技術に出会ったとき、どの階層の、どの問題を、どういう迂回路で解いているのかを見抜けること</a:t>
+            </a:r>
+            <a:endParaRPr lang="en-US" sz="1700" dirty="0"/>
+          </a:p>
+        </p:txBody>
+      </p:sp>
+      <p:sp>
+        <p:nvSpPr>
+          <p:cNvPr id="8" name="Text 6"/>
+          <p:cNvSpPr/>
+          <p:nvPr/>
+        </p:nvSpPr>
+        <p:spPr>
+          <a:xfrm>
+            <a:off x="1188720" y="3090672"/>
+            <a:ext cx="4572000" cy="457200"/>
+          </a:xfrm>
+          <a:prstGeom prst="rect">
+            <a:avLst/>
+          </a:prstGeom>
+          <a:noFill/>
+          <a:ln/>
+        </p:spPr>
+        <p:txBody>
+          <a:bodyPr wrap="square" lIns="0" tIns="0" rIns="0" bIns="0" rtlCol="0" anchor="ctr"/>
+          <a:lstStyle/>
+          <a:p>
+            <a:pPr algn="r" indent="0" marL="0">
+              <a:buNone/>
+            </a:pPr>
+            <a:r>
+              <a:rPr lang="en-US" sz="1500" dirty="0">
+                <a:solidFill>
+                  <a:srgbClr val="16191D"/>
+                </a:solidFill>
+                <a:latin typeface="Yu Gothic" pitchFamily="34" charset="0"/>
+                <a:ea typeface="Yu Gothic" pitchFamily="34" charset="-122"/>
+                <a:cs typeface="Yu Gothic" pitchFamily="34" charset="-120"/>
+              </a:rPr>
+              <a:t>1936年のチューリングの定義</a:t>
+            </a:r>
+            <a:endParaRPr lang="en-US" sz="1500" dirty="0"/>
+          </a:p>
+        </p:txBody>
+      </p:sp>
+      <p:sp>
+        <p:nvSpPr>
+          <p:cNvPr id="9" name="Shape 7"/>
+          <p:cNvSpPr/>
+          <p:nvPr/>
+        </p:nvSpPr>
+        <p:spPr>
+          <a:xfrm>
+            <a:off x="5943600" y="3218688"/>
+            <a:ext cx="640080" cy="201168"/>
+          </a:xfrm>
+          <a:prstGeom prst="rightArrow">
+            <a:avLst/>
+          </a:prstGeom>
+          <a:solidFill>
+            <a:srgbClr val="0B5CAD"/>
+          </a:solidFill>
+          <a:ln/>
+        </p:spPr>
+      </p:sp>
+      <p:sp>
+        <p:nvSpPr>
+          <p:cNvPr id="10" name="Text 8"/>
+          <p:cNvSpPr/>
+          <p:nvPr/>
+        </p:nvSpPr>
+        <p:spPr>
+          <a:xfrm>
+            <a:off x="6766560" y="3090672"/>
+            <a:ext cx="4206240" cy="457200"/>
+          </a:xfrm>
+          <a:prstGeom prst="rect">
+            <a:avLst/>
+          </a:prstGeom>
+          <a:noFill/>
+          <a:ln/>
+        </p:spPr>
+        <p:txBody>
+          <a:bodyPr wrap="square" lIns="0" tIns="0" rIns="0" bIns="0" rtlCol="0" anchor="ctr"/>
+          <a:lstStyle/>
+          <a:p>
+            <a:pPr indent="0" marL="0">
+              <a:buNone/>
+            </a:pPr>
+            <a:r>
+              <a:rPr lang="en-US" sz="1600" b="1" dirty="0">
+                <a:solidFill>
+                  <a:srgbClr val="0B5CAD"/>
+                </a:solidFill>
+                <a:latin typeface="Yu Gothic" pitchFamily="34" charset="0"/>
+                <a:ea typeface="Yu Gothic" pitchFamily="34" charset="-122"/>
+                <a:cs typeface="Yu Gothic" pitchFamily="34" charset="-120"/>
+              </a:rPr>
+              <a:t>変わっていない</a:t>
+            </a:r>
+            <a:endParaRPr lang="en-US" sz="1600" dirty="0"/>
+          </a:p>
+        </p:txBody>
+      </p:sp>
+      <p:sp>
+        <p:nvSpPr>
+          <p:cNvPr id="11" name="Text 9"/>
+          <p:cNvSpPr/>
+          <p:nvPr/>
+        </p:nvSpPr>
+        <p:spPr>
+          <a:xfrm>
+            <a:off x="1188720" y="3712464"/>
+            <a:ext cx="4572000" cy="457200"/>
+          </a:xfrm>
+          <a:prstGeom prst="rect">
+            <a:avLst/>
+          </a:prstGeom>
+          <a:noFill/>
+          <a:ln/>
+        </p:spPr>
+        <p:txBody>
+          <a:bodyPr wrap="square" lIns="0" tIns="0" rIns="0" bIns="0" rtlCol="0" anchor="ctr"/>
+          <a:lstStyle/>
+          <a:p>
+            <a:pPr algn="r" indent="0" marL="0">
+              <a:buNone/>
+            </a:pPr>
+            <a:r>
+              <a:rPr lang="en-US" sz="1500" dirty="0">
+                <a:solidFill>
+                  <a:srgbClr val="16191D"/>
+                </a:solidFill>
+                <a:latin typeface="Yu Gothic" pitchFamily="34" charset="0"/>
+                <a:ea typeface="Yu Gothic" pitchFamily="34" charset="-122"/>
+                <a:cs typeface="Yu Gothic" pitchFamily="34" charset="-120"/>
+              </a:rPr>
+              <a:t>記憶階層の考え方</a:t>
+            </a:r>
+            <a:endParaRPr lang="en-US" sz="1500" dirty="0"/>
+          </a:p>
+        </p:txBody>
+      </p:sp>
+      <p:sp>
+        <p:nvSpPr>
+          <p:cNvPr id="12" name="Shape 10"/>
+          <p:cNvSpPr/>
+          <p:nvPr/>
+        </p:nvSpPr>
+        <p:spPr>
+          <a:xfrm>
+            <a:off x="5943600" y="3840480"/>
+            <a:ext cx="640080" cy="201168"/>
+          </a:xfrm>
+          <a:prstGeom prst="rightArrow">
+            <a:avLst/>
+          </a:prstGeom>
+          <a:solidFill>
+            <a:srgbClr val="0B5CAD"/>
+          </a:solidFill>
+          <a:ln/>
+        </p:spPr>
+      </p:sp>
+      <p:sp>
+        <p:nvSpPr>
+          <p:cNvPr id="13" name="Text 11"/>
+          <p:cNvSpPr/>
+          <p:nvPr/>
+        </p:nvSpPr>
+        <p:spPr>
+          <a:xfrm>
+            <a:off x="6766560" y="3712464"/>
+            <a:ext cx="4206240" cy="457200"/>
+          </a:xfrm>
+          <a:prstGeom prst="rect">
+            <a:avLst/>
+          </a:prstGeom>
+          <a:noFill/>
+          <a:ln/>
+        </p:spPr>
+        <p:txBody>
+          <a:bodyPr wrap="square" lIns="0" tIns="0" rIns="0" bIns="0" rtlCol="0" anchor="ctr"/>
+          <a:lstStyle/>
+          <a:p>
+            <a:pPr indent="0" marL="0">
+              <a:buNone/>
+            </a:pPr>
+            <a:r>
+              <a:rPr lang="en-US" sz="1600" b="1" dirty="0">
+                <a:solidFill>
+                  <a:srgbClr val="0B5CAD"/>
+                </a:solidFill>
+                <a:latin typeface="Yu Gothic" pitchFamily="34" charset="0"/>
+                <a:ea typeface="Yu Gothic" pitchFamily="34" charset="-122"/>
+                <a:cs typeface="Yu Gothic" pitchFamily="34" charset="-120"/>
+              </a:rPr>
+              <a:t>変わっていない</a:t>
+            </a:r>
+            <a:endParaRPr lang="en-US" sz="1600" dirty="0"/>
+          </a:p>
+        </p:txBody>
+      </p:sp>
+      <p:sp>
+        <p:nvSpPr>
+          <p:cNvPr id="14" name="Text 12"/>
+          <p:cNvSpPr/>
+          <p:nvPr/>
+        </p:nvSpPr>
+        <p:spPr>
+          <a:xfrm>
+            <a:off x="1188720" y="4334256"/>
+            <a:ext cx="4572000" cy="457200"/>
+          </a:xfrm>
+          <a:prstGeom prst="rect">
+            <a:avLst/>
+          </a:prstGeom>
+          <a:noFill/>
+          <a:ln/>
+        </p:spPr>
+        <p:txBody>
+          <a:bodyPr wrap="square" lIns="0" tIns="0" rIns="0" bIns="0" rtlCol="0" anchor="ctr"/>
+          <a:lstStyle/>
+          <a:p>
+            <a:pPr algn="r" indent="0" marL="0">
+              <a:buNone/>
+            </a:pPr>
+            <a:r>
+              <a:rPr lang="en-US" sz="1500" dirty="0">
+                <a:solidFill>
+                  <a:srgbClr val="16191D"/>
+                </a:solidFill>
+                <a:latin typeface="Yu Gothic" pitchFamily="34" charset="0"/>
+                <a:ea typeface="Yu Gothic" pitchFamily="34" charset="-122"/>
+                <a:cs typeface="Yu Gothic" pitchFamily="34" charset="-120"/>
+              </a:rPr>
+              <a:t>階層化の思想</a:t>
+            </a:r>
+            <a:endParaRPr lang="en-US" sz="1500" dirty="0"/>
+          </a:p>
+        </p:txBody>
+      </p:sp>
+      <p:sp>
+        <p:nvSpPr>
+          <p:cNvPr id="15" name="Shape 13"/>
+          <p:cNvSpPr/>
+          <p:nvPr/>
+        </p:nvSpPr>
+        <p:spPr>
+          <a:xfrm>
+            <a:off x="5943600" y="4462272"/>
+            <a:ext cx="640080" cy="201168"/>
+          </a:xfrm>
+          <a:prstGeom prst="rightArrow">
+            <a:avLst/>
+          </a:prstGeom>
+          <a:solidFill>
+            <a:srgbClr val="0B5CAD"/>
+          </a:solidFill>
+          <a:ln/>
+        </p:spPr>
+      </p:sp>
+      <p:sp>
+        <p:nvSpPr>
+          <p:cNvPr id="16" name="Text 14"/>
+          <p:cNvSpPr/>
+          <p:nvPr/>
+        </p:nvSpPr>
+        <p:spPr>
+          <a:xfrm>
+            <a:off x="6766560" y="4334256"/>
+            <a:ext cx="4206240" cy="457200"/>
+          </a:xfrm>
+          <a:prstGeom prst="rect">
+            <a:avLst/>
+          </a:prstGeom>
+          <a:noFill/>
+          <a:ln/>
+        </p:spPr>
+        <p:txBody>
+          <a:bodyPr wrap="square" lIns="0" tIns="0" rIns="0" bIns="0" rtlCol="0" anchor="ctr"/>
+          <a:lstStyle/>
+          <a:p>
+            <a:pPr indent="0" marL="0">
+              <a:buNone/>
+            </a:pPr>
+            <a:r>
+              <a:rPr lang="en-US" sz="1600" b="1" dirty="0">
+                <a:solidFill>
+                  <a:srgbClr val="0B5CAD"/>
+                </a:solidFill>
+                <a:latin typeface="Yu Gothic" pitchFamily="34" charset="0"/>
+                <a:ea typeface="Yu Gothic" pitchFamily="34" charset="-122"/>
+                <a:cs typeface="Yu Gothic" pitchFamily="34" charset="-120"/>
+              </a:rPr>
+              <a:t>変わっていない</a:t>
+            </a:r>
+            <a:endParaRPr lang="en-US" sz="1600" dirty="0"/>
+          </a:p>
+        </p:txBody>
+      </p:sp>
+      <p:sp>
+        <p:nvSpPr>
+          <p:cNvPr id="17" name="Text 15"/>
+          <p:cNvSpPr/>
+          <p:nvPr/>
+        </p:nvSpPr>
+        <p:spPr>
+          <a:xfrm>
+            <a:off x="1188720" y="4956048"/>
+            <a:ext cx="4572000" cy="457200"/>
+          </a:xfrm>
+          <a:prstGeom prst="rect">
+            <a:avLst/>
+          </a:prstGeom>
+          <a:noFill/>
+          <a:ln/>
+        </p:spPr>
+        <p:txBody>
+          <a:bodyPr wrap="square" lIns="0" tIns="0" rIns="0" bIns="0" rtlCol="0" anchor="ctr"/>
+          <a:lstStyle/>
+          <a:p>
+            <a:pPr algn="r" indent="0" marL="0">
+              <a:buNone/>
+            </a:pPr>
+            <a:r>
+              <a:rPr lang="en-US" sz="1500" dirty="0">
+                <a:solidFill>
+                  <a:srgbClr val="16191D"/>
+                </a:solidFill>
+                <a:latin typeface="Yu Gothic" pitchFamily="34" charset="0"/>
+                <a:ea typeface="Yu Gothic" pitchFamily="34" charset="-122"/>
+                <a:cs typeface="Yu Gothic" pitchFamily="34" charset="-120"/>
+              </a:rPr>
+              <a:t>限界を知って迂回する姿勢</a:t>
+            </a:r>
+            <a:endParaRPr lang="en-US" sz="1500" dirty="0"/>
+          </a:p>
+        </p:txBody>
+      </p:sp>
+      <p:sp>
+        <p:nvSpPr>
+          <p:cNvPr id="18" name="Shape 16"/>
+          <p:cNvSpPr/>
+          <p:nvPr/>
+        </p:nvSpPr>
+        <p:spPr>
+          <a:xfrm>
+            <a:off x="5943600" y="5084064"/>
+            <a:ext cx="640080" cy="201168"/>
+          </a:xfrm>
+          <a:prstGeom prst="rightArrow">
+            <a:avLst/>
+          </a:prstGeom>
+          <a:solidFill>
+            <a:srgbClr val="0B5CAD"/>
+          </a:solidFill>
+          <a:ln/>
+        </p:spPr>
+      </p:sp>
+      <p:sp>
+        <p:nvSpPr>
+          <p:cNvPr id="19" name="Text 17"/>
+          <p:cNvSpPr/>
+          <p:nvPr/>
+        </p:nvSpPr>
+        <p:spPr>
+          <a:xfrm>
+            <a:off x="6766560" y="4956048"/>
+            <a:ext cx="4206240" cy="457200"/>
+          </a:xfrm>
+          <a:prstGeom prst="rect">
+            <a:avLst/>
+          </a:prstGeom>
+          <a:noFill/>
+          <a:ln/>
+        </p:spPr>
+        <p:txBody>
+          <a:bodyPr wrap="square" lIns="0" tIns="0" rIns="0" bIns="0" rtlCol="0" anchor="ctr"/>
+          <a:lstStyle/>
+          <a:p>
+            <a:pPr indent="0" marL="0">
+              <a:buNone/>
+            </a:pPr>
+            <a:r>
+              <a:rPr lang="en-US" sz="1600" b="1" dirty="0">
+                <a:solidFill>
+                  <a:srgbClr val="0B5CAD"/>
+                </a:solidFill>
+                <a:latin typeface="Yu Gothic" pitchFamily="34" charset="0"/>
+                <a:ea typeface="Yu Gothic" pitchFamily="34" charset="-122"/>
+                <a:cs typeface="Yu Gothic" pitchFamily="34" charset="-120"/>
+              </a:rPr>
+              <a:t>変わっていない</a:t>
+            </a:r>
+            <a:endParaRPr lang="en-US" sz="1600" dirty="0"/>
+          </a:p>
+        </p:txBody>
+      </p:sp>
+      <p:sp>
+        <p:nvSpPr>
+          <p:cNvPr id="20" name="Text 18"/>
+          <p:cNvSpPr/>
+          <p:nvPr/>
+        </p:nvSpPr>
+        <p:spPr>
+          <a:xfrm>
+            <a:off x="685800" y="5669280"/>
+            <a:ext cx="10789920" cy="457200"/>
+          </a:xfrm>
+          <a:prstGeom prst="rect">
+            <a:avLst/>
+          </a:prstGeom>
+          <a:noFill/>
+          <a:ln/>
+        </p:spPr>
+        <p:txBody>
+          <a:bodyPr wrap="square" lIns="0" tIns="0" rIns="0" bIns="0" rtlCol="0" anchor="ctr"/>
           <a:lstStyle/>
           <a:p>
             <a:pPr indent="0" marL="0">
               <a:lnSpc>
-                <a:spcPts val="2100"/>
+                <a:spcPts val="2000"/>
               </a:lnSpc>
               <a:buNone/>
             </a:pPr>
             <a:r>
-              <a:rPr lang="en-US" sz="1400" dirty="0">
-                <a:solidFill>
-                  <a:srgbClr val="16191D"/>
-                </a:solidFill>
-                <a:latin typeface="Yu Gothic" pitchFamily="34" charset="0"/>
-                <a:ea typeface="Yu Gothic" pitchFamily="34" charset="-122"/>
-                <a:cs typeface="Yu Gothic" pitchFamily="34" charset="-120"/>
-              </a:rPr>
-              <a:t>自己教師あり学習が LLM の事前学習に適している理由を、「正解ラベルをどう用意するか」に触れて説明せよ。</a:t>
-            </a:r>
-            <a:endParaRPr lang="en-US" sz="1400" dirty="0"/>
-          </a:p>
-        </p:txBody>
-      </p:sp>
-      <p:sp>
-        <p:nvSpPr>
-          <p:cNvPr id="8" name="Shape 6"/>
-          <p:cNvSpPr/>
-          <p:nvPr/>
-        </p:nvSpPr>
-        <p:spPr>
-          <a:xfrm>
-            <a:off x="685800" y="2560320"/>
-            <a:ext cx="868680" cy="402336"/>
-          </a:xfrm>
-          <a:prstGeom prst="roundRect">
-            <a:avLst>
-              <a:gd name="adj" fmla="val 18182"/>
-            </a:avLst>
-          </a:prstGeom>
-          <a:solidFill>
-            <a:srgbClr val="D9E6F4"/>
-          </a:solidFill>
-          <a:ln w="12700">
-            <a:solidFill>
-              <a:srgbClr val="0B5CAD"/>
-            </a:solidFill>
-            <a:prstDash val="solid"/>
-          </a:ln>
-        </p:spPr>
-      </p:sp>
-      <p:sp>
-        <p:nvSpPr>
-          <p:cNvPr id="9" name="Text 7"/>
-          <p:cNvSpPr/>
-          <p:nvPr/>
-        </p:nvSpPr>
-        <p:spPr>
-          <a:xfrm>
-            <a:off x="685800" y="2560320"/>
-            <a:ext cx="868680" cy="402336"/>
-          </a:xfrm>
-          <a:prstGeom prst="rect">
-            <a:avLst/>
-          </a:prstGeom>
-          <a:noFill/>
-          <a:ln/>
-        </p:spPr>
-        <p:txBody>
-          <a:bodyPr wrap="square" lIns="0" tIns="0" rIns="0" bIns="0" rtlCol="0" anchor="ctr"/>
-          <a:lstStyle/>
-          <a:p>
-            <a:pPr algn="ctr" indent="0" marL="0">
-              <a:buNone/>
-            </a:pPr>
-            <a:r>
-              <a:rPr lang="en-US" sz="1300" b="1" dirty="0">
-                <a:solidFill>
-                  <a:srgbClr val="0B5CAD"/>
-                </a:solidFill>
-                <a:latin typeface="Courier New" pitchFamily="34" charset="0"/>
-                <a:ea typeface="Courier New" pitchFamily="34" charset="-122"/>
-                <a:cs typeface="Courier New" pitchFamily="34" charset="-120"/>
-              </a:rPr>
-              <a:t>13-2</a:t>
+              <a:rPr lang="en-US" sz="1300" dirty="0">
+                <a:solidFill>
+                  <a:srgbClr val="5F6672"/>
+                </a:solidFill>
+                <a:latin typeface="Yu Gothic" pitchFamily="34" charset="0"/>
+                <a:ea typeface="Yu Gothic" pitchFamily="34" charset="-122"/>
+                <a:cs typeface="Yu Gothic" pitchFamily="34" charset="-120"/>
+              </a:rPr>
+              <a:t>それが、この13回で身につけてほしいことである。</a:t>
             </a:r>
             <a:endParaRPr lang="en-US" sz="1300" dirty="0"/>
-          </a:p>
-        </p:txBody>
-      </p:sp>
-      <p:sp>
-        <p:nvSpPr>
-          <p:cNvPr id="10" name="Text 8"/>
-          <p:cNvSpPr/>
-          <p:nvPr/>
-        </p:nvSpPr>
-        <p:spPr>
-          <a:xfrm>
-            <a:off x="1783080" y="2542032"/>
-            <a:ext cx="9692640" cy="722376"/>
-          </a:xfrm>
-          <a:prstGeom prst="rect">
-            <a:avLst/>
-          </a:prstGeom>
-          <a:noFill/>
-          <a:ln/>
-        </p:spPr>
-        <p:txBody>
-          <a:bodyPr wrap="square" lIns="0" tIns="0" rIns="0" bIns="0" rtlCol="0" anchor="t"/>
-          <a:lstStyle/>
-          <a:p>
-            <a:pPr indent="0" marL="0">
-              <a:lnSpc>
-                <a:spcPts val="2100"/>
-              </a:lnSpc>
-              <a:buNone/>
-            </a:pPr>
-            <a:r>
-              <a:rPr lang="en-US" sz="1400" dirty="0">
-                <a:solidFill>
-                  <a:srgbClr val="16191D"/>
-                </a:solidFill>
-                <a:latin typeface="Yu Gothic" pitchFamily="34" charset="0"/>
-                <a:ea typeface="Yu Gothic" pitchFamily="34" charset="-122"/>
-                <a:cs typeface="Yu Gothic" pitchFamily="34" charset="-120"/>
-              </a:rPr>
-              <a:t>トランスフォーマが RNN より大規模化に適している理由を、第5回の並列性の内容に触れて説明せよ。</a:t>
-            </a:r>
-            <a:endParaRPr lang="en-US" sz="1400" dirty="0"/>
-          </a:p>
-        </p:txBody>
-      </p:sp>
-      <p:sp>
-        <p:nvSpPr>
-          <p:cNvPr id="11" name="Shape 9"/>
-          <p:cNvSpPr/>
-          <p:nvPr/>
-        </p:nvSpPr>
-        <p:spPr>
-          <a:xfrm>
-            <a:off x="685800" y="3429000"/>
-            <a:ext cx="868680" cy="402336"/>
-          </a:xfrm>
-          <a:prstGeom prst="roundRect">
-            <a:avLst>
-              <a:gd name="adj" fmla="val 18182"/>
-            </a:avLst>
-          </a:prstGeom>
-          <a:solidFill>
-            <a:srgbClr val="D9E6F4"/>
-          </a:solidFill>
-          <a:ln w="12700">
-            <a:solidFill>
-              <a:srgbClr val="0B5CAD"/>
-            </a:solidFill>
-            <a:prstDash val="solid"/>
-          </a:ln>
-        </p:spPr>
-      </p:sp>
-      <p:sp>
-        <p:nvSpPr>
-          <p:cNvPr id="12" name="Text 10"/>
-          <p:cNvSpPr/>
-          <p:nvPr/>
-        </p:nvSpPr>
-        <p:spPr>
-          <a:xfrm>
-            <a:off x="685800" y="3429000"/>
-            <a:ext cx="868680" cy="402336"/>
-          </a:xfrm>
-          <a:prstGeom prst="rect">
-            <a:avLst/>
-          </a:prstGeom>
-          <a:noFill/>
-          <a:ln/>
-        </p:spPr>
-        <p:txBody>
-          <a:bodyPr wrap="square" lIns="0" tIns="0" rIns="0" bIns="0" rtlCol="0" anchor="ctr"/>
-          <a:lstStyle/>
-          <a:p>
-            <a:pPr algn="ctr" indent="0" marL="0">
-              <a:buNone/>
-            </a:pPr>
-            <a:r>
-              <a:rPr lang="en-US" sz="1300" b="1" dirty="0">
-                <a:solidFill>
-                  <a:srgbClr val="0B5CAD"/>
-                </a:solidFill>
-                <a:latin typeface="Courier New" pitchFamily="34" charset="0"/>
-                <a:ea typeface="Courier New" pitchFamily="34" charset="-122"/>
-                <a:cs typeface="Courier New" pitchFamily="34" charset="-120"/>
-              </a:rPr>
-              <a:t>13-3</a:t>
-            </a:r>
-            <a:endParaRPr lang="en-US" sz="1300" dirty="0"/>
-          </a:p>
-        </p:txBody>
-      </p:sp>
-      <p:sp>
-        <p:nvSpPr>
-          <p:cNvPr id="13" name="Text 11"/>
-          <p:cNvSpPr/>
-          <p:nvPr/>
-        </p:nvSpPr>
-        <p:spPr>
-          <a:xfrm>
-            <a:off x="1783080" y="3410712"/>
-            <a:ext cx="9692640" cy="722376"/>
-          </a:xfrm>
-          <a:prstGeom prst="rect">
-            <a:avLst/>
-          </a:prstGeom>
-          <a:noFill/>
-          <a:ln/>
-        </p:spPr>
-        <p:txBody>
-          <a:bodyPr wrap="square" lIns="0" tIns="0" rIns="0" bIns="0" rtlCol="0" anchor="t"/>
-          <a:lstStyle/>
-          <a:p>
-            <a:pPr indent="0" marL="0">
-              <a:lnSpc>
-                <a:spcPts val="2100"/>
-              </a:lnSpc>
-              <a:buNone/>
-            </a:pPr>
-            <a:r>
-              <a:rPr lang="en-US" sz="1400" dirty="0">
-                <a:solidFill>
-                  <a:srgbClr val="16191D"/>
-                </a:solidFill>
-                <a:latin typeface="Yu Gothic" pitchFamily="34" charset="0"/>
-                <a:ea typeface="Yu Gothic" pitchFamily="34" charset="-122"/>
-                <a:cs typeface="Yu Gothic" pitchFamily="34" charset="-120"/>
-              </a:rPr>
-              <a:t>LLM のハルシネーションが「バグではなく仕組みの帰結」である理由を、LLM が実際に計算していることに基づいて説明せよ。</a:t>
-            </a:r>
-            <a:endParaRPr lang="en-US" sz="1400" dirty="0"/>
-          </a:p>
-        </p:txBody>
-      </p:sp>
-      <p:sp>
-        <p:nvSpPr>
-          <p:cNvPr id="14" name="Shape 12"/>
-          <p:cNvSpPr/>
-          <p:nvPr/>
-        </p:nvSpPr>
-        <p:spPr>
-          <a:xfrm>
-            <a:off x="685800" y="4297680"/>
-            <a:ext cx="868680" cy="402336"/>
-          </a:xfrm>
-          <a:prstGeom prst="roundRect">
-            <a:avLst>
-              <a:gd name="adj" fmla="val 18182"/>
-            </a:avLst>
-          </a:prstGeom>
-          <a:solidFill>
-            <a:srgbClr val="D9E6F4"/>
-          </a:solidFill>
-          <a:ln w="12700">
-            <a:solidFill>
-              <a:srgbClr val="0B5CAD"/>
-            </a:solidFill>
-            <a:prstDash val="solid"/>
-          </a:ln>
-        </p:spPr>
-      </p:sp>
-      <p:sp>
-        <p:nvSpPr>
-          <p:cNvPr id="15" name="Text 13"/>
-          <p:cNvSpPr/>
-          <p:nvPr/>
-        </p:nvSpPr>
-        <p:spPr>
-          <a:xfrm>
-            <a:off x="685800" y="4297680"/>
-            <a:ext cx="868680" cy="402336"/>
-          </a:xfrm>
-          <a:prstGeom prst="rect">
-            <a:avLst/>
-          </a:prstGeom>
-          <a:noFill/>
-          <a:ln/>
-        </p:spPr>
-        <p:txBody>
-          <a:bodyPr wrap="square" lIns="0" tIns="0" rIns="0" bIns="0" rtlCol="0" anchor="ctr"/>
-          <a:lstStyle/>
-          <a:p>
-            <a:pPr algn="ctr" indent="0" marL="0">
-              <a:buNone/>
-            </a:pPr>
-            <a:r>
-              <a:rPr lang="en-US" sz="1300" b="1" dirty="0">
-                <a:solidFill>
-                  <a:srgbClr val="0B5CAD"/>
-                </a:solidFill>
-                <a:latin typeface="Courier New" pitchFamily="34" charset="0"/>
-                <a:ea typeface="Courier New" pitchFamily="34" charset="-122"/>
-                <a:cs typeface="Courier New" pitchFamily="34" charset="-120"/>
-              </a:rPr>
-              <a:t>13-4</a:t>
-            </a:r>
-            <a:endParaRPr lang="en-US" sz="1300" dirty="0"/>
-          </a:p>
-        </p:txBody>
-      </p:sp>
-      <p:sp>
-        <p:nvSpPr>
-          <p:cNvPr id="16" name="Text 14"/>
-          <p:cNvSpPr/>
-          <p:nvPr/>
-        </p:nvSpPr>
-        <p:spPr>
-          <a:xfrm>
-            <a:off x="1783080" y="4279392"/>
-            <a:ext cx="9692640" cy="722376"/>
-          </a:xfrm>
-          <a:prstGeom prst="rect">
-            <a:avLst/>
-          </a:prstGeom>
-          <a:noFill/>
-          <a:ln/>
-        </p:spPr>
-        <p:txBody>
-          <a:bodyPr wrap="square" lIns="0" tIns="0" rIns="0" bIns="0" rtlCol="0" anchor="t"/>
-          <a:lstStyle/>
-          <a:p>
-            <a:pPr indent="0" marL="0">
-              <a:lnSpc>
-                <a:spcPts val="2100"/>
-              </a:lnSpc>
-              <a:buNone/>
-            </a:pPr>
-            <a:r>
-              <a:rPr lang="en-US" sz="1400" dirty="0">
-                <a:solidFill>
-                  <a:srgbClr val="16191D"/>
-                </a:solidFill>
-                <a:latin typeface="Yu Gothic" pitchFamily="34" charset="0"/>
-                <a:ea typeface="Yu Gothic" pitchFamily="34" charset="-122"/>
-                <a:cs typeface="Yu Gothic" pitchFamily="34" charset="-120"/>
-              </a:rPr>
-              <a:t>プロンプトインジェクションと SQL インジェクションの共通する構造を述べよ。また、SQL には確実な対策があるのに前者には無いのはなぜか。</a:t>
-            </a:r>
-            <a:endParaRPr lang="en-US" sz="1400" dirty="0"/>
-          </a:p>
-        </p:txBody>
-      </p:sp>
-      <p:sp>
-        <p:nvSpPr>
-          <p:cNvPr id="17" name="Shape 15"/>
-          <p:cNvSpPr/>
-          <p:nvPr/>
-        </p:nvSpPr>
-        <p:spPr>
-          <a:xfrm>
-            <a:off x="685800" y="5166360"/>
-            <a:ext cx="868680" cy="402336"/>
-          </a:xfrm>
-          <a:prstGeom prst="roundRect">
-            <a:avLst>
-              <a:gd name="adj" fmla="val 18182"/>
-            </a:avLst>
-          </a:prstGeom>
-          <a:solidFill>
-            <a:srgbClr val="D9E6F4"/>
-          </a:solidFill>
-          <a:ln w="12700">
-            <a:solidFill>
-              <a:srgbClr val="0B5CAD"/>
-            </a:solidFill>
-            <a:prstDash val="solid"/>
-          </a:ln>
-        </p:spPr>
-      </p:sp>
-      <p:sp>
-        <p:nvSpPr>
-          <p:cNvPr id="18" name="Text 16"/>
-          <p:cNvSpPr/>
-          <p:nvPr/>
-        </p:nvSpPr>
-        <p:spPr>
-          <a:xfrm>
-            <a:off x="685800" y="5166360"/>
-            <a:ext cx="868680" cy="402336"/>
-          </a:xfrm>
-          <a:prstGeom prst="rect">
-            <a:avLst/>
-          </a:prstGeom>
-          <a:noFill/>
-          <a:ln/>
-        </p:spPr>
-        <p:txBody>
-          <a:bodyPr wrap="square" lIns="0" tIns="0" rIns="0" bIns="0" rtlCol="0" anchor="ctr"/>
-          <a:lstStyle/>
-          <a:p>
-            <a:pPr algn="ctr" indent="0" marL="0">
-              <a:buNone/>
-            </a:pPr>
-            <a:r>
-              <a:rPr lang="en-US" sz="1300" b="1" dirty="0">
-                <a:solidFill>
-                  <a:srgbClr val="0B5CAD"/>
-                </a:solidFill>
-                <a:latin typeface="Courier New" pitchFamily="34" charset="0"/>
-                <a:ea typeface="Courier New" pitchFamily="34" charset="-122"/>
-                <a:cs typeface="Courier New" pitchFamily="34" charset="-120"/>
-              </a:rPr>
-              <a:t>13-5</a:t>
-            </a:r>
-            <a:endParaRPr lang="en-US" sz="1300" dirty="0"/>
-          </a:p>
-        </p:txBody>
-      </p:sp>
-      <p:sp>
-        <p:nvSpPr>
-          <p:cNvPr id="19" name="Text 17"/>
-          <p:cNvSpPr/>
-          <p:nvPr/>
-        </p:nvSpPr>
-        <p:spPr>
-          <a:xfrm>
-            <a:off x="1783080" y="5148072"/>
-            <a:ext cx="9692640" cy="722376"/>
-          </a:xfrm>
-          <a:prstGeom prst="rect">
-            <a:avLst/>
-          </a:prstGeom>
-          <a:noFill/>
-          <a:ln/>
-        </p:spPr>
-        <p:txBody>
-          <a:bodyPr wrap="square" lIns="0" tIns="0" rIns="0" bIns="0" rtlCol="0" anchor="t"/>
-          <a:lstStyle/>
-          <a:p>
-            <a:pPr indent="0" marL="0">
-              <a:lnSpc>
-                <a:spcPts val="2100"/>
-              </a:lnSpc>
-              <a:buNone/>
-            </a:pPr>
-            <a:r>
-              <a:rPr lang="en-US" sz="1400" dirty="0">
-                <a:solidFill>
-                  <a:srgbClr val="16191D"/>
-                </a:solidFill>
-                <a:latin typeface="Yu Gothic" pitchFamily="34" charset="0"/>
-                <a:ea typeface="Yu Gothic" pitchFamily="34" charset="-122"/>
-                <a:cs typeface="Yu Gothic" pitchFamily="34" charset="-120"/>
-              </a:rPr>
-              <a:t>（総括）本講義で扱った13の話題のうち2つを選び、それらが共通して使っている考え方を1つ挙げて論じよ。</a:t>
-            </a:r>
-            <a:endParaRPr lang="en-US" sz="1400" dirty="0"/>
           </a:p>
         </p:txBody>
       </p:sp>
@@ -18172,6 +18114,695 @@
 <file path=ppt/slides/slide28.xml><?xml version="1.0" encoding="utf-8"?>
 <p:sld xmlns:a="http://schemas.openxmlformats.org/drawingml/2006/main" xmlns:r="http://schemas.openxmlformats.org/officeDocument/2006/relationships" xmlns:p="http://schemas.openxmlformats.org/presentationml/2006/main">
   <p:cSld name="Slide 28">
+    <p:bg>
+      <p:bgPr>
+        <a:solidFill>
+          <a:srgbClr val="FFFFFF"/>
+        </a:solidFill>
+      </p:bgPr>
+    </p:bg>
+    <p:spTree>
+      <p:nvGrpSpPr>
+        <p:cNvPr id="1" name=""/>
+        <p:cNvGrpSpPr/>
+        <p:nvPr/>
+      </p:nvGrpSpPr>
+      <p:grpSpPr>
+        <a:xfrm>
+          <a:off x="0" y="0"/>
+          <a:ext cx="0" cy="0"/>
+          <a:chOff x="0" y="0"/>
+          <a:chExt cx="0" cy="0"/>
+        </a:xfrm>
+      </p:grpSpPr>
+      <p:sp>
+        <p:nvSpPr>
+          <p:cNvPr id="2" name="Text 0"/>
+          <p:cNvSpPr/>
+          <p:nvPr/>
+        </p:nvSpPr>
+        <p:spPr>
+          <a:xfrm>
+            <a:off x="566928" y="310896"/>
+            <a:ext cx="4572000" cy="256032"/>
+          </a:xfrm>
+          <a:prstGeom prst="rect">
+            <a:avLst/>
+          </a:prstGeom>
+          <a:noFill/>
+          <a:ln/>
+        </p:spPr>
+        <p:txBody>
+          <a:bodyPr wrap="square" lIns="0" tIns="0" rIns="0" bIns="0" rtlCol="0" anchor="ctr"/>
+          <a:lstStyle/>
+          <a:p>
+            <a:pPr indent="0" marL="0">
+              <a:buNone/>
+            </a:pPr>
+            <a:r>
+              <a:rPr lang="en-US" sz="1200" b="1" dirty="0">
+                <a:solidFill>
+                  <a:srgbClr val="0B5CAD"/>
+                </a:solidFill>
+                <a:latin typeface="Yu Gothic" pitchFamily="34" charset="0"/>
+                <a:ea typeface="Yu Gothic" pitchFamily="34" charset="-122"/>
+                <a:cs typeface="Yu Gothic" pitchFamily="34" charset="-120"/>
+              </a:rPr>
+              <a:t>第13回</a:t>
+            </a:r>
+            <a:endParaRPr lang="en-US" sz="1200" dirty="0"/>
+          </a:p>
+        </p:txBody>
+      </p:sp>
+      <p:sp>
+        <p:nvSpPr>
+          <p:cNvPr id="3" name="Text 1"/>
+          <p:cNvSpPr/>
+          <p:nvPr/>
+        </p:nvSpPr>
+        <p:spPr>
+          <a:xfrm>
+            <a:off x="548640" y="603504"/>
+            <a:ext cx="11064240" cy="731520"/>
+          </a:xfrm>
+          <a:prstGeom prst="rect">
+            <a:avLst/>
+          </a:prstGeom>
+          <a:noFill/>
+          <a:ln/>
+        </p:spPr>
+        <p:txBody>
+          <a:bodyPr wrap="square" lIns="0" tIns="0" rIns="0" bIns="0" rtlCol="0" anchor="t"/>
+          <a:lstStyle/>
+          <a:p>
+            <a:pPr indent="0" marL="0">
+              <a:buNone/>
+            </a:pPr>
+            <a:r>
+              <a:rPr lang="en-US" sz="3000" b="1" dirty="0">
+                <a:solidFill>
+                  <a:srgbClr val="16191D"/>
+                </a:solidFill>
+                <a:latin typeface="Yu Gothic" pitchFamily="34" charset="0"/>
+                <a:ea typeface="Yu Gothic" pitchFamily="34" charset="-122"/>
+                <a:cs typeface="Yu Gothic" pitchFamily="34" charset="-120"/>
+              </a:rPr>
+              <a:t>演習</a:t>
+            </a:r>
+            <a:endParaRPr lang="en-US" sz="3000" dirty="0"/>
+          </a:p>
+        </p:txBody>
+      </p:sp>
+      <p:sp>
+        <p:nvSpPr>
+          <p:cNvPr id="4" name="Text 2"/>
+          <p:cNvSpPr/>
+          <p:nvPr/>
+        </p:nvSpPr>
+        <p:spPr>
+          <a:xfrm>
+            <a:off x="11247120" y="6355080"/>
+            <a:ext cx="548640" cy="274320"/>
+          </a:xfrm>
+          <a:prstGeom prst="rect">
+            <a:avLst/>
+          </a:prstGeom>
+          <a:noFill/>
+          <a:ln/>
+        </p:spPr>
+        <p:txBody>
+          <a:bodyPr wrap="square" lIns="0" tIns="0" rIns="0" bIns="0" rtlCol="0" anchor="ctr"/>
+          <a:lstStyle/>
+          <a:p>
+            <a:pPr algn="r" indent="0" marL="0">
+              <a:buNone/>
+            </a:pPr>
+            <a:r>
+              <a:rPr lang="en-US" sz="1000" dirty="0">
+                <a:solidFill>
+                  <a:srgbClr val="5F6672"/>
+                </a:solidFill>
+                <a:latin typeface="Yu Gothic" pitchFamily="34" charset="0"/>
+                <a:ea typeface="Yu Gothic" pitchFamily="34" charset="-122"/>
+                <a:cs typeface="Yu Gothic" pitchFamily="34" charset="-120"/>
+              </a:rPr>
+              <a:t>28</a:t>
+            </a:r>
+            <a:endParaRPr lang="en-US" sz="1000" dirty="0"/>
+          </a:p>
+        </p:txBody>
+      </p:sp>
+      <p:sp>
+        <p:nvSpPr>
+          <p:cNvPr id="5" name="Shape 3"/>
+          <p:cNvSpPr/>
+          <p:nvPr/>
+        </p:nvSpPr>
+        <p:spPr>
+          <a:xfrm>
+            <a:off x="685800" y="1691640"/>
+            <a:ext cx="868680" cy="402336"/>
+          </a:xfrm>
+          <a:prstGeom prst="roundRect">
+            <a:avLst>
+              <a:gd name="adj" fmla="val 18182"/>
+            </a:avLst>
+          </a:prstGeom>
+          <a:solidFill>
+            <a:srgbClr val="D9E6F4"/>
+          </a:solidFill>
+          <a:ln w="12700">
+            <a:solidFill>
+              <a:srgbClr val="0B5CAD"/>
+            </a:solidFill>
+            <a:prstDash val="solid"/>
+          </a:ln>
+        </p:spPr>
+      </p:sp>
+      <p:sp>
+        <p:nvSpPr>
+          <p:cNvPr id="6" name="Text 4"/>
+          <p:cNvSpPr/>
+          <p:nvPr/>
+        </p:nvSpPr>
+        <p:spPr>
+          <a:xfrm>
+            <a:off x="685800" y="1691640"/>
+            <a:ext cx="868680" cy="402336"/>
+          </a:xfrm>
+          <a:prstGeom prst="rect">
+            <a:avLst/>
+          </a:prstGeom>
+          <a:noFill/>
+          <a:ln/>
+        </p:spPr>
+        <p:txBody>
+          <a:bodyPr wrap="square" lIns="0" tIns="0" rIns="0" bIns="0" rtlCol="0" anchor="ctr"/>
+          <a:lstStyle/>
+          <a:p>
+            <a:pPr algn="ctr" indent="0" marL="0">
+              <a:buNone/>
+            </a:pPr>
+            <a:r>
+              <a:rPr lang="en-US" sz="1300" b="1" dirty="0">
+                <a:solidFill>
+                  <a:srgbClr val="0B5CAD"/>
+                </a:solidFill>
+                <a:latin typeface="Courier New" pitchFamily="34" charset="0"/>
+                <a:ea typeface="Courier New" pitchFamily="34" charset="-122"/>
+                <a:cs typeface="Courier New" pitchFamily="34" charset="-120"/>
+              </a:rPr>
+              <a:t>13-1</a:t>
+            </a:r>
+            <a:endParaRPr lang="en-US" sz="1300" dirty="0"/>
+          </a:p>
+        </p:txBody>
+      </p:sp>
+      <p:sp>
+        <p:nvSpPr>
+          <p:cNvPr id="7" name="Text 5"/>
+          <p:cNvSpPr/>
+          <p:nvPr/>
+        </p:nvSpPr>
+        <p:spPr>
+          <a:xfrm>
+            <a:off x="1783080" y="1673352"/>
+            <a:ext cx="9692640" cy="722376"/>
+          </a:xfrm>
+          <a:prstGeom prst="rect">
+            <a:avLst/>
+          </a:prstGeom>
+          <a:noFill/>
+          <a:ln/>
+        </p:spPr>
+        <p:txBody>
+          <a:bodyPr wrap="square" lIns="0" tIns="0" rIns="0" bIns="0" rtlCol="0" anchor="t"/>
+          <a:lstStyle/>
+          <a:p>
+            <a:pPr indent="0" marL="0">
+              <a:lnSpc>
+                <a:spcPts val="2100"/>
+              </a:lnSpc>
+              <a:buNone/>
+            </a:pPr>
+            <a:r>
+              <a:rPr lang="en-US" sz="1400" dirty="0">
+                <a:solidFill>
+                  <a:srgbClr val="16191D"/>
+                </a:solidFill>
+                <a:latin typeface="Yu Gothic" pitchFamily="34" charset="0"/>
+                <a:ea typeface="Yu Gothic" pitchFamily="34" charset="-122"/>
+                <a:cs typeface="Yu Gothic" pitchFamily="34" charset="-120"/>
+              </a:rPr>
+              <a:t>自己教師あり学習が LLM の事前学習に適している理由を、「正解ラベルをどう用意するか」に触れて説明せよ。</a:t>
+            </a:r>
+            <a:endParaRPr lang="en-US" sz="1400" dirty="0"/>
+          </a:p>
+        </p:txBody>
+      </p:sp>
+      <p:sp>
+        <p:nvSpPr>
+          <p:cNvPr id="8" name="Shape 6"/>
+          <p:cNvSpPr/>
+          <p:nvPr/>
+        </p:nvSpPr>
+        <p:spPr>
+          <a:xfrm>
+            <a:off x="685800" y="2560320"/>
+            <a:ext cx="868680" cy="402336"/>
+          </a:xfrm>
+          <a:prstGeom prst="roundRect">
+            <a:avLst>
+              <a:gd name="adj" fmla="val 18182"/>
+            </a:avLst>
+          </a:prstGeom>
+          <a:solidFill>
+            <a:srgbClr val="D9E6F4"/>
+          </a:solidFill>
+          <a:ln w="12700">
+            <a:solidFill>
+              <a:srgbClr val="0B5CAD"/>
+            </a:solidFill>
+            <a:prstDash val="solid"/>
+          </a:ln>
+        </p:spPr>
+      </p:sp>
+      <p:sp>
+        <p:nvSpPr>
+          <p:cNvPr id="9" name="Text 7"/>
+          <p:cNvSpPr/>
+          <p:nvPr/>
+        </p:nvSpPr>
+        <p:spPr>
+          <a:xfrm>
+            <a:off x="685800" y="2560320"/>
+            <a:ext cx="868680" cy="402336"/>
+          </a:xfrm>
+          <a:prstGeom prst="rect">
+            <a:avLst/>
+          </a:prstGeom>
+          <a:noFill/>
+          <a:ln/>
+        </p:spPr>
+        <p:txBody>
+          <a:bodyPr wrap="square" lIns="0" tIns="0" rIns="0" bIns="0" rtlCol="0" anchor="ctr"/>
+          <a:lstStyle/>
+          <a:p>
+            <a:pPr algn="ctr" indent="0" marL="0">
+              <a:buNone/>
+            </a:pPr>
+            <a:r>
+              <a:rPr lang="en-US" sz="1300" b="1" dirty="0">
+                <a:solidFill>
+                  <a:srgbClr val="0B5CAD"/>
+                </a:solidFill>
+                <a:latin typeface="Courier New" pitchFamily="34" charset="0"/>
+                <a:ea typeface="Courier New" pitchFamily="34" charset="-122"/>
+                <a:cs typeface="Courier New" pitchFamily="34" charset="-120"/>
+              </a:rPr>
+              <a:t>13-2</a:t>
+            </a:r>
+            <a:endParaRPr lang="en-US" sz="1300" dirty="0"/>
+          </a:p>
+        </p:txBody>
+      </p:sp>
+      <p:sp>
+        <p:nvSpPr>
+          <p:cNvPr id="10" name="Text 8"/>
+          <p:cNvSpPr/>
+          <p:nvPr/>
+        </p:nvSpPr>
+        <p:spPr>
+          <a:xfrm>
+            <a:off x="1783080" y="2542032"/>
+            <a:ext cx="9692640" cy="722376"/>
+          </a:xfrm>
+          <a:prstGeom prst="rect">
+            <a:avLst/>
+          </a:prstGeom>
+          <a:noFill/>
+          <a:ln/>
+        </p:spPr>
+        <p:txBody>
+          <a:bodyPr wrap="square" lIns="0" tIns="0" rIns="0" bIns="0" rtlCol="0" anchor="t"/>
+          <a:lstStyle/>
+          <a:p>
+            <a:pPr indent="0" marL="0">
+              <a:lnSpc>
+                <a:spcPts val="2100"/>
+              </a:lnSpc>
+              <a:buNone/>
+            </a:pPr>
+            <a:r>
+              <a:rPr lang="en-US" sz="1400" dirty="0">
+                <a:solidFill>
+                  <a:srgbClr val="16191D"/>
+                </a:solidFill>
+                <a:latin typeface="Yu Gothic" pitchFamily="34" charset="0"/>
+                <a:ea typeface="Yu Gothic" pitchFamily="34" charset="-122"/>
+                <a:cs typeface="Yu Gothic" pitchFamily="34" charset="-120"/>
+              </a:rPr>
+              <a:t>トランスフォーマが RNN より大規模化に適している理由を、第5回の並列性の内容に触れて説明せよ。</a:t>
+            </a:r>
+            <a:endParaRPr lang="en-US" sz="1400" dirty="0"/>
+          </a:p>
+        </p:txBody>
+      </p:sp>
+      <p:sp>
+        <p:nvSpPr>
+          <p:cNvPr id="11" name="Shape 9"/>
+          <p:cNvSpPr/>
+          <p:nvPr/>
+        </p:nvSpPr>
+        <p:spPr>
+          <a:xfrm>
+            <a:off x="685800" y="3429000"/>
+            <a:ext cx="868680" cy="402336"/>
+          </a:xfrm>
+          <a:prstGeom prst="roundRect">
+            <a:avLst>
+              <a:gd name="adj" fmla="val 18182"/>
+            </a:avLst>
+          </a:prstGeom>
+          <a:solidFill>
+            <a:srgbClr val="D9E6F4"/>
+          </a:solidFill>
+          <a:ln w="12700">
+            <a:solidFill>
+              <a:srgbClr val="0B5CAD"/>
+            </a:solidFill>
+            <a:prstDash val="solid"/>
+          </a:ln>
+        </p:spPr>
+      </p:sp>
+      <p:sp>
+        <p:nvSpPr>
+          <p:cNvPr id="12" name="Text 10"/>
+          <p:cNvSpPr/>
+          <p:nvPr/>
+        </p:nvSpPr>
+        <p:spPr>
+          <a:xfrm>
+            <a:off x="685800" y="3429000"/>
+            <a:ext cx="868680" cy="402336"/>
+          </a:xfrm>
+          <a:prstGeom prst="rect">
+            <a:avLst/>
+          </a:prstGeom>
+          <a:noFill/>
+          <a:ln/>
+        </p:spPr>
+        <p:txBody>
+          <a:bodyPr wrap="square" lIns="0" tIns="0" rIns="0" bIns="0" rtlCol="0" anchor="ctr"/>
+          <a:lstStyle/>
+          <a:p>
+            <a:pPr algn="ctr" indent="0" marL="0">
+              <a:buNone/>
+            </a:pPr>
+            <a:r>
+              <a:rPr lang="en-US" sz="1300" b="1" dirty="0">
+                <a:solidFill>
+                  <a:srgbClr val="0B5CAD"/>
+                </a:solidFill>
+                <a:latin typeface="Courier New" pitchFamily="34" charset="0"/>
+                <a:ea typeface="Courier New" pitchFamily="34" charset="-122"/>
+                <a:cs typeface="Courier New" pitchFamily="34" charset="-120"/>
+              </a:rPr>
+              <a:t>13-3</a:t>
+            </a:r>
+            <a:endParaRPr lang="en-US" sz="1300" dirty="0"/>
+          </a:p>
+        </p:txBody>
+      </p:sp>
+      <p:sp>
+        <p:nvSpPr>
+          <p:cNvPr id="13" name="Text 11"/>
+          <p:cNvSpPr/>
+          <p:nvPr/>
+        </p:nvSpPr>
+        <p:spPr>
+          <a:xfrm>
+            <a:off x="1783080" y="3410712"/>
+            <a:ext cx="9692640" cy="722376"/>
+          </a:xfrm>
+          <a:prstGeom prst="rect">
+            <a:avLst/>
+          </a:prstGeom>
+          <a:noFill/>
+          <a:ln/>
+        </p:spPr>
+        <p:txBody>
+          <a:bodyPr wrap="square" lIns="0" tIns="0" rIns="0" bIns="0" rtlCol="0" anchor="t"/>
+          <a:lstStyle/>
+          <a:p>
+            <a:pPr indent="0" marL="0">
+              <a:lnSpc>
+                <a:spcPts val="2100"/>
+              </a:lnSpc>
+              <a:buNone/>
+            </a:pPr>
+            <a:r>
+              <a:rPr lang="en-US" sz="1400" dirty="0">
+                <a:solidFill>
+                  <a:srgbClr val="16191D"/>
+                </a:solidFill>
+                <a:latin typeface="Yu Gothic" pitchFamily="34" charset="0"/>
+                <a:ea typeface="Yu Gothic" pitchFamily="34" charset="-122"/>
+                <a:cs typeface="Yu Gothic" pitchFamily="34" charset="-120"/>
+              </a:rPr>
+              <a:t>LLM のハルシネーションが「バグではなく仕組みの帰結」である理由を、LLM が実際に計算していることに基づいて説明せよ。</a:t>
+            </a:r>
+            <a:endParaRPr lang="en-US" sz="1400" dirty="0"/>
+          </a:p>
+        </p:txBody>
+      </p:sp>
+      <p:sp>
+        <p:nvSpPr>
+          <p:cNvPr id="14" name="Shape 12"/>
+          <p:cNvSpPr/>
+          <p:nvPr/>
+        </p:nvSpPr>
+        <p:spPr>
+          <a:xfrm>
+            <a:off x="685800" y="4297680"/>
+            <a:ext cx="868680" cy="402336"/>
+          </a:xfrm>
+          <a:prstGeom prst="roundRect">
+            <a:avLst>
+              <a:gd name="adj" fmla="val 18182"/>
+            </a:avLst>
+          </a:prstGeom>
+          <a:solidFill>
+            <a:srgbClr val="D9E6F4"/>
+          </a:solidFill>
+          <a:ln w="12700">
+            <a:solidFill>
+              <a:srgbClr val="0B5CAD"/>
+            </a:solidFill>
+            <a:prstDash val="solid"/>
+          </a:ln>
+        </p:spPr>
+      </p:sp>
+      <p:sp>
+        <p:nvSpPr>
+          <p:cNvPr id="15" name="Text 13"/>
+          <p:cNvSpPr/>
+          <p:nvPr/>
+        </p:nvSpPr>
+        <p:spPr>
+          <a:xfrm>
+            <a:off x="685800" y="4297680"/>
+            <a:ext cx="868680" cy="402336"/>
+          </a:xfrm>
+          <a:prstGeom prst="rect">
+            <a:avLst/>
+          </a:prstGeom>
+          <a:noFill/>
+          <a:ln/>
+        </p:spPr>
+        <p:txBody>
+          <a:bodyPr wrap="square" lIns="0" tIns="0" rIns="0" bIns="0" rtlCol="0" anchor="ctr"/>
+          <a:lstStyle/>
+          <a:p>
+            <a:pPr algn="ctr" indent="0" marL="0">
+              <a:buNone/>
+            </a:pPr>
+            <a:r>
+              <a:rPr lang="en-US" sz="1300" b="1" dirty="0">
+                <a:solidFill>
+                  <a:srgbClr val="0B5CAD"/>
+                </a:solidFill>
+                <a:latin typeface="Courier New" pitchFamily="34" charset="0"/>
+                <a:ea typeface="Courier New" pitchFamily="34" charset="-122"/>
+                <a:cs typeface="Courier New" pitchFamily="34" charset="-120"/>
+              </a:rPr>
+              <a:t>13-4</a:t>
+            </a:r>
+            <a:endParaRPr lang="en-US" sz="1300" dirty="0"/>
+          </a:p>
+        </p:txBody>
+      </p:sp>
+      <p:sp>
+        <p:nvSpPr>
+          <p:cNvPr id="16" name="Text 14"/>
+          <p:cNvSpPr/>
+          <p:nvPr/>
+        </p:nvSpPr>
+        <p:spPr>
+          <a:xfrm>
+            <a:off x="1783080" y="4279392"/>
+            <a:ext cx="9692640" cy="722376"/>
+          </a:xfrm>
+          <a:prstGeom prst="rect">
+            <a:avLst/>
+          </a:prstGeom>
+          <a:noFill/>
+          <a:ln/>
+        </p:spPr>
+        <p:txBody>
+          <a:bodyPr wrap="square" lIns="0" tIns="0" rIns="0" bIns="0" rtlCol="0" anchor="t"/>
+          <a:lstStyle/>
+          <a:p>
+            <a:pPr indent="0" marL="0">
+              <a:lnSpc>
+                <a:spcPts val="2100"/>
+              </a:lnSpc>
+              <a:buNone/>
+            </a:pPr>
+            <a:r>
+              <a:rPr lang="en-US" sz="1400" dirty="0">
+                <a:solidFill>
+                  <a:srgbClr val="16191D"/>
+                </a:solidFill>
+                <a:latin typeface="Yu Gothic" pitchFamily="34" charset="0"/>
+                <a:ea typeface="Yu Gothic" pitchFamily="34" charset="-122"/>
+                <a:cs typeface="Yu Gothic" pitchFamily="34" charset="-120"/>
+              </a:rPr>
+              <a:t>プロンプトインジェクションと SQL インジェクションの共通する構造を述べよ。また、SQL には確実な対策があるのに前者には無いのはなぜか。</a:t>
+            </a:r>
+            <a:endParaRPr lang="en-US" sz="1400" dirty="0"/>
+          </a:p>
+        </p:txBody>
+      </p:sp>
+      <p:sp>
+        <p:nvSpPr>
+          <p:cNvPr id="17" name="Shape 15"/>
+          <p:cNvSpPr/>
+          <p:nvPr/>
+        </p:nvSpPr>
+        <p:spPr>
+          <a:xfrm>
+            <a:off x="685800" y="5166360"/>
+            <a:ext cx="868680" cy="402336"/>
+          </a:xfrm>
+          <a:prstGeom prst="roundRect">
+            <a:avLst>
+              <a:gd name="adj" fmla="val 18182"/>
+            </a:avLst>
+          </a:prstGeom>
+          <a:solidFill>
+            <a:srgbClr val="D9E6F4"/>
+          </a:solidFill>
+          <a:ln w="12700">
+            <a:solidFill>
+              <a:srgbClr val="0B5CAD"/>
+            </a:solidFill>
+            <a:prstDash val="solid"/>
+          </a:ln>
+        </p:spPr>
+      </p:sp>
+      <p:sp>
+        <p:nvSpPr>
+          <p:cNvPr id="18" name="Text 16"/>
+          <p:cNvSpPr/>
+          <p:nvPr/>
+        </p:nvSpPr>
+        <p:spPr>
+          <a:xfrm>
+            <a:off x="685800" y="5166360"/>
+            <a:ext cx="868680" cy="402336"/>
+          </a:xfrm>
+          <a:prstGeom prst="rect">
+            <a:avLst/>
+          </a:prstGeom>
+          <a:noFill/>
+          <a:ln/>
+        </p:spPr>
+        <p:txBody>
+          <a:bodyPr wrap="square" lIns="0" tIns="0" rIns="0" bIns="0" rtlCol="0" anchor="ctr"/>
+          <a:lstStyle/>
+          <a:p>
+            <a:pPr algn="ctr" indent="0" marL="0">
+              <a:buNone/>
+            </a:pPr>
+            <a:r>
+              <a:rPr lang="en-US" sz="1300" b="1" dirty="0">
+                <a:solidFill>
+                  <a:srgbClr val="0B5CAD"/>
+                </a:solidFill>
+                <a:latin typeface="Courier New" pitchFamily="34" charset="0"/>
+                <a:ea typeface="Courier New" pitchFamily="34" charset="-122"/>
+                <a:cs typeface="Courier New" pitchFamily="34" charset="-120"/>
+              </a:rPr>
+              <a:t>13-5</a:t>
+            </a:r>
+            <a:endParaRPr lang="en-US" sz="1300" dirty="0"/>
+          </a:p>
+        </p:txBody>
+      </p:sp>
+      <p:sp>
+        <p:nvSpPr>
+          <p:cNvPr id="19" name="Text 17"/>
+          <p:cNvSpPr/>
+          <p:nvPr/>
+        </p:nvSpPr>
+        <p:spPr>
+          <a:xfrm>
+            <a:off x="1783080" y="5148072"/>
+            <a:ext cx="9692640" cy="722376"/>
+          </a:xfrm>
+          <a:prstGeom prst="rect">
+            <a:avLst/>
+          </a:prstGeom>
+          <a:noFill/>
+          <a:ln/>
+        </p:spPr>
+        <p:txBody>
+          <a:bodyPr wrap="square" lIns="0" tIns="0" rIns="0" bIns="0" rtlCol="0" anchor="t"/>
+          <a:lstStyle/>
+          <a:p>
+            <a:pPr indent="0" marL="0">
+              <a:lnSpc>
+                <a:spcPts val="2100"/>
+              </a:lnSpc>
+              <a:buNone/>
+            </a:pPr>
+            <a:r>
+              <a:rPr lang="en-US" sz="1400" dirty="0">
+                <a:solidFill>
+                  <a:srgbClr val="16191D"/>
+                </a:solidFill>
+                <a:latin typeface="Yu Gothic" pitchFamily="34" charset="0"/>
+                <a:ea typeface="Yu Gothic" pitchFamily="34" charset="-122"/>
+                <a:cs typeface="Yu Gothic" pitchFamily="34" charset="-120"/>
+              </a:rPr>
+              <a:t>（総括）本講義で扱った13の話題のうち2つを選び、それらが共通して使っている考え方を1つ挙げて論じよ。</a:t>
+            </a:r>
+            <a:endParaRPr lang="en-US" sz="1400" dirty="0"/>
+          </a:p>
+        </p:txBody>
+      </p:sp>
+    </p:spTree>
+  </p:cSld>
+  <p:clrMapOvr>
+    <a:masterClrMapping/>
+  </p:clrMapOvr>
+</p:sld>
+</file>
+
+<file path=ppt/slides/slide29.xml><?xml version="1.0" encoding="utf-8"?>
+<p:sld xmlns:a="http://schemas.openxmlformats.org/drawingml/2006/main" xmlns:r="http://schemas.openxmlformats.org/officeDocument/2006/relationships" xmlns:p="http://schemas.openxmlformats.org/presentationml/2006/main">
+  <p:cSld name="Slide 29">
     <p:bg>
       <p:bgPr>
         <a:solidFill>

--- a/slides/第13回_機械学習からLLM・エージェントAIへ.pptx
+++ b/slides/第13回_機械学習からLLM・エージェントAIへ.pptx
@@ -18312,7 +18312,7 @@
                 <a:ea typeface="Courier New" pitchFamily="34" charset="-122"/>
                 <a:cs typeface="Courier New" pitchFamily="34" charset="-120"/>
               </a:rPr>
-              <a:t>13-1</a:t>
+              <a:t>13-2</a:t>
             </a:r>
             <a:endParaRPr lang="en-US" sz="1300" dirty="0"/>
           </a:p>
@@ -18420,7 +18420,7 @@
                 <a:ea typeface="Courier New" pitchFamily="34" charset="-122"/>
                 <a:cs typeface="Courier New" pitchFamily="34" charset="-120"/>
               </a:rPr>
-              <a:t>13-2</a:t>
+              <a:t>13-5</a:t>
             </a:r>
             <a:endParaRPr lang="en-US" sz="1300" dirty="0"/>
           </a:p>
@@ -18528,7 +18528,7 @@
                 <a:ea typeface="Courier New" pitchFamily="34" charset="-122"/>
                 <a:cs typeface="Courier New" pitchFamily="34" charset="-120"/>
               </a:rPr>
-              <a:t>13-3</a:t>
+              <a:t>13-6</a:t>
             </a:r>
             <a:endParaRPr lang="en-US" sz="1300" dirty="0"/>
           </a:p>
@@ -18636,7 +18636,7 @@
                 <a:ea typeface="Courier New" pitchFamily="34" charset="-122"/>
                 <a:cs typeface="Courier New" pitchFamily="34" charset="-120"/>
               </a:rPr>
-              <a:t>13-4</a:t>
+              <a:t>13-8</a:t>
             </a:r>
             <a:endParaRPr lang="en-US" sz="1300" dirty="0"/>
           </a:p>
@@ -18744,7 +18744,7 @@
                 <a:ea typeface="Courier New" pitchFamily="34" charset="-122"/>
                 <a:cs typeface="Courier New" pitchFamily="34" charset="-120"/>
               </a:rPr>
-              <a:t>13-5</a:t>
+              <a:t>13-10</a:t>
             </a:r>
             <a:endParaRPr lang="en-US" sz="1300" dirty="0"/>
           </a:p>
